--- a/public/fun/pack/pptx/review/보장점검양식_29_부모님점검_억새밭.pptx
+++ b/public/fun/pack/pptx/review/보장점검양식_29_부모님점검_억새밭.pptx
@@ -3286,6 +3286,14 @@
 <file path=ppt/slides/slide1.xml><?xml version="1.0" encoding="utf-8"?>
 <p:sld xmlns:a="http://schemas.openxmlformats.org/drawingml/2006/main" xmlns:p="http://schemas.openxmlformats.org/presentationml/2006/main" xmlns:r="http://schemas.openxmlformats.org/officeDocument/2006/relationships">
   <p:cSld>
+    <p:bg>
+      <p:bgPr>
+        <a:solidFill>
+          <a:srgbClr val="493B27"/>
+        </a:solidFill>
+        <a:effectLst/>
+      </p:bgPr>
+    </p:bg>
     <p:spTree>
       <p:nvGrpSpPr>
         <p:cNvPr id="1" name=""/>
@@ -3293,30 +3301,102 @@
         <p:nvPr/>
       </p:nvGrpSpPr>
       <p:grpSpPr/>
-      <p:pic>
-        <p:nvPicPr>
-          <p:cNvPr id="3" name="표지 그림" descr="review-29.jpg"/>
-          <p:cNvPicPr>
-            <a:picLocks noChangeAspect="1"/>
-          </p:cNvPicPr>
+      <p:sp>
+        <p:nvSpPr>
+          <p:cNvPr id="3" name="장식"/>
+          <p:cNvSpPr/>
           <p:nvPr/>
-        </p:nvPicPr>
-        <p:blipFill>
-          <a:blip r:embed="rId2"/>
-          <a:stretch>
-            <a:fillRect/>
-          </a:stretch>
-        </p:blipFill>
-        <p:spPr>
-          <a:xfrm>
-            <a:off x="0" y="0"/>
-            <a:ext cx="12191695" cy="6858000"/>
+        </p:nvSpPr>
+        <p:spPr>
+          <a:xfrm>
+            <a:off x="5684367" y="1097280"/>
+            <a:ext cx="822960" cy="822960"/>
+          </a:xfrm>
+          <a:prstGeom prst="ellipse">
+            <a:avLst/>
+          </a:prstGeom>
+          <a:solidFill>
+            <a:srgbClr val="D8B279"/>
+          </a:solidFill>
+          <a:ln>
+            <a:noFill/>
+          </a:ln>
+        </p:spPr>
+        <p:txBody>
+          <a:bodyPr rtlCol="0" anchor="ctr"/>
+          <a:lstStyle/>
+          <a:p>
+            <a:pPr algn="ctr"/>
+          </a:p>
+        </p:txBody>
+      </p:sp>
+      <p:sp>
+        <p:nvSpPr>
+          <p:cNvPr id="4" name="장식"/>
+          <p:cNvSpPr/>
+          <p:nvPr/>
+        </p:nvSpPr>
+        <p:spPr>
+          <a:xfrm>
+            <a:off x="5547207" y="4663440"/>
+            <a:ext cx="1097280" cy="18288"/>
           </a:xfrm>
           <a:prstGeom prst="rect">
             <a:avLst/>
           </a:prstGeom>
-        </p:spPr>
-      </p:pic>
+          <a:solidFill>
+            <a:srgbClr val="FFFFFF"/>
+          </a:solidFill>
+          <a:ln>
+            <a:noFill/>
+          </a:ln>
+        </p:spPr>
+        <p:txBody>
+          <a:bodyPr rtlCol="0" anchor="ctr"/>
+          <a:lstStyle/>
+          <a:p>
+            <a:pPr algn="ctr"/>
+          </a:p>
+        </p:txBody>
+      </p:sp>
+      <p:sp>
+        <p:nvSpPr>
+          <p:cNvPr id="5" name="라벨"/>
+          <p:cNvSpPr txBox="1"/>
+          <p:nvPr/>
+        </p:nvSpPr>
+        <p:spPr>
+          <a:xfrm>
+            <a:off x="1828754" y="1874520"/>
+            <a:ext cx="8534186" cy="274320"/>
+          </a:xfrm>
+          <a:prstGeom prst="rect">
+            <a:avLst/>
+          </a:prstGeom>
+          <a:noFill/>
+        </p:spPr>
+        <p:txBody>
+          <a:bodyPr wrap="square" lIns="54864" rIns="54864" tIns="27432" bIns="27432" anchor="t">
+            <a:noAutofit/>
+          </a:bodyPr>
+          <a:lstStyle/>
+          <a:p>
+            <a:pPr algn="ctr">
+              <a:lnSpc>
+                <a:spcPct val="115000"/>
+              </a:lnSpc>
+            </a:pPr>
+            <a:r>
+              <a:rPr sz="1000" b="1" i="0" spc="250">
+                <a:solidFill>
+                  <a:srgbClr val="FFFFFF"/>
+                </a:solidFill>
+              </a:rPr>
+              <a:t>INSURANCE CHECK</a:t>
+            </a:r>
+          </a:p>
+        </p:txBody>
+      </p:sp>
       <p:sp>
         <p:nvSpPr>
           <p:cNvPr id="2" name="Title 1"/>
@@ -3329,8 +3409,8 @@
         </p:nvSpPr>
         <p:spPr>
           <a:xfrm>
-            <a:off x="853418" y="2057400"/>
-            <a:ext cx="6095847" cy="1554480"/>
+            <a:off x="1828754" y="2331720"/>
+            <a:ext cx="8534186" cy="1188720"/>
           </a:xfrm>
         </p:spPr>
         <p:txBody>
@@ -3339,7 +3419,7 @@
           </a:bodyPr>
           <a:lstStyle/>
           <a:p>
-            <a:pPr algn="l">
+            <a:pPr algn="ctr">
               <a:lnSpc>
                 <a:spcPct val="105000"/>
               </a:lnSpc>
@@ -3347,7 +3427,7 @@
             <a:r>
               <a:rPr sz="3600" b="1" i="0">
                 <a:solidFill>
-                  <a:srgbClr val="59472C"/>
+                  <a:srgbClr val="FFFFFF"/>
                 </a:solidFill>
               </a:rPr>
               <a:t>우리 보험 점검 시간</a:t>
@@ -3357,14 +3437,14 @@
       </p:sp>
       <p:sp>
         <p:nvSpPr>
-          <p:cNvPr id="4" name="한 줄 문구"/>
+          <p:cNvPr id="6" name="한 줄 문구"/>
           <p:cNvSpPr txBox="1"/>
           <p:nvPr/>
         </p:nvSpPr>
         <p:spPr>
           <a:xfrm>
-            <a:off x="853418" y="3749039"/>
-            <a:ext cx="6095847" cy="822960"/>
+            <a:off x="1828754" y="3611880"/>
+            <a:ext cx="8534186" cy="822960"/>
           </a:xfrm>
           <a:prstGeom prst="rect">
             <a:avLst/>
@@ -3377,32 +3457,32 @@
           </a:bodyPr>
           <a:lstStyle/>
           <a:p>
-            <a:pPr algn="l">
+            <a:pPr algn="ctr">
               <a:lnSpc>
                 <a:spcPct val="115000"/>
               </a:lnSpc>
             </a:pPr>
             <a:r>
-              <a:rPr sz="1700" b="0" i="1">
+              <a:rPr sz="1700" b="0" i="0">
                 <a:solidFill>
-                  <a:srgbClr val="59472C"/>
+                  <a:srgbClr val="FFFFFF"/>
                 </a:solidFill>
               </a:rPr>
-              <a:t>한가위에 내려가서 증권을 같이 봅니다</a:t>
+              <a:t>내려가서 증권을 같이 봅니다</a:t>
             </a:r>
           </a:p>
         </p:txBody>
       </p:sp>
       <p:sp>
         <p:nvSpPr>
-          <p:cNvPr id="5" name="안내 문구"/>
+          <p:cNvPr id="7" name="안내 문구"/>
           <p:cNvSpPr txBox="1"/>
           <p:nvPr/>
         </p:nvSpPr>
         <p:spPr>
           <a:xfrm>
-            <a:off x="853418" y="4617720"/>
-            <a:ext cx="6095847" cy="914400"/>
+            <a:off x="1828754" y="4480560"/>
+            <a:ext cx="8534186" cy="914400"/>
           </a:xfrm>
           <a:prstGeom prst="rect">
             <a:avLst/>
@@ -3415,7 +3495,7 @@
           </a:bodyPr>
           <a:lstStyle/>
           <a:p>
-            <a:pPr algn="l">
+            <a:pPr algn="ctr">
               <a:lnSpc>
                 <a:spcPct val="115000"/>
               </a:lnSpc>
@@ -3423,14 +3503,14 @@
             <a:r>
               <a:rPr sz="1400" b="0" i="0">
                 <a:solidFill>
-                  <a:srgbClr val="666666"/>
+                  <a:srgbClr val="FFFFFF"/>
                 </a:solidFill>
               </a:rPr>
-              <a:t>부모님 점검 · 2027. 00. 00</a:t>
+              <a:t>부모님 점검 · 날짜 입력</a:t>
             </a:r>
           </a:p>
           <a:p>
-            <a:pPr algn="l">
+            <a:pPr algn="ctr">
               <a:lnSpc>
                 <a:spcPct val="115000"/>
               </a:lnSpc>
@@ -3438,7 +3518,7 @@
             <a:r>
               <a:rPr sz="1400" b="0" i="0">
                 <a:solidFill>
-                  <a:srgbClr val="666666"/>
+                  <a:srgbClr val="FFFFFF"/>
                 </a:solidFill>
               </a:rPr>
               <a:t>가입 내용을 정리하고 함께 확인하는 양식</a:t>
@@ -3460,7 +3540,7 @@
     <p:bg>
       <p:bgPr>
         <a:solidFill>
-          <a:srgbClr val="FFFFFF"/>
+          <a:srgbClr val="F6E9D5"/>
         </a:solidFill>
         <a:effectLst/>
       </p:bgPr>
@@ -3480,14 +3560,16 @@
         </p:nvSpPr>
         <p:spPr>
           <a:xfrm>
-            <a:off x="-182880" y="6144768"/>
-            <a:ext cx="12557455" cy="731520"/>
-          </a:xfrm>
-          <a:prstGeom prst="wave">
-            <a:avLst/>
+            <a:off x="640080" y="566928"/>
+            <a:ext cx="64008" cy="868680"/>
+          </a:xfrm>
+          <a:prstGeom prst="roundRect">
+            <a:avLst>
+              <a:gd name="adj" fmla="val 50000"/>
+            </a:avLst>
           </a:prstGeom>
           <a:solidFill>
-            <a:srgbClr val="ECE3D4"/>
+            <a:srgbClr val="D8B279"/>
           </a:solidFill>
           <a:ln>
             <a:noFill/>
@@ -3503,20 +3585,58 @@
       </p:sp>
       <p:sp>
         <p:nvSpPr>
-          <p:cNvPr id="4" name="장식"/>
+          <p:cNvPr id="4" name="상단 라벨"/>
+          <p:cNvSpPr txBox="1"/>
+          <p:nvPr/>
+        </p:nvSpPr>
+        <p:spPr>
+          <a:xfrm>
+            <a:off x="868680" y="274320"/>
+            <a:ext cx="5486400" cy="274320"/>
+          </a:xfrm>
+          <a:prstGeom prst="rect">
+            <a:avLst/>
+          </a:prstGeom>
+          <a:noFill/>
+        </p:spPr>
+        <p:txBody>
+          <a:bodyPr wrap="square" lIns="54864" rIns="54864" tIns="27432" bIns="27432" anchor="ctr">
+            <a:noAutofit/>
+          </a:bodyPr>
+          <a:lstStyle/>
+          <a:p>
+            <a:pPr algn="l">
+              <a:lnSpc>
+                <a:spcPct val="115000"/>
+              </a:lnSpc>
+            </a:pPr>
+            <a:r>
+              <a:rPr sz="900" b="1" i="0" spc="250">
+                <a:solidFill>
+                  <a:srgbClr val="8E8780"/>
+                </a:solidFill>
+              </a:rPr>
+              <a:t>INSURANCE CHECK</a:t>
+            </a:r>
+          </a:p>
+        </p:txBody>
+      </p:sp>
+      <p:sp>
+        <p:nvSpPr>
+          <p:cNvPr id="5" name="포인트"/>
           <p:cNvSpPr/>
           <p:nvPr/>
         </p:nvSpPr>
         <p:spPr>
           <a:xfrm>
-            <a:off x="-182880" y="6400800"/>
-            <a:ext cx="12557455" cy="502920"/>
-          </a:xfrm>
-          <a:prstGeom prst="wave">
+            <a:off x="11167567" y="667512"/>
+            <a:ext cx="310896" cy="310896"/>
+          </a:xfrm>
+          <a:prstGeom prst="ellipse">
             <a:avLst/>
           </a:prstGeom>
           <a:solidFill>
-            <a:srgbClr val="9D7D4D"/>
+            <a:srgbClr val="EBD2AD"/>
           </a:solidFill>
           <a:ln>
             <a:noFill/>
@@ -3542,8 +3662,8 @@
         </p:nvSpPr>
         <p:spPr>
           <a:xfrm>
-            <a:off x="640080" y="457200"/>
-            <a:ext cx="9722815" cy="868680"/>
+            <a:off x="868680" y="566928"/>
+            <a:ext cx="9448495" cy="868680"/>
           </a:xfrm>
         </p:spPr>
         <p:txBody>
@@ -3560,7 +3680,7 @@
             <a:r>
               <a:rPr sz="3000" b="1" i="0">
                 <a:solidFill>
-                  <a:srgbClr val="59472C"/>
+                  <a:srgbClr val="26231F"/>
                 </a:solidFill>
               </a:rPr>
               <a:t>점검 대상 현황</a:t>
@@ -3570,14 +3690,14 @@
       </p:sp>
       <p:graphicFrame>
         <p:nvGraphicFramePr>
-          <p:cNvPr id="5" name="표"/>
+          <p:cNvPr id="6" name="표"/>
           <p:cNvGraphicFramePr>
             <a:graphicFrameLocks noGrp="1"/>
           </p:cNvGraphicFramePr>
           <p:nvPr/>
         </p:nvGraphicFramePr>
         <p:xfrm>
-          <a:off x="640080" y="1554480"/>
+          <a:off x="640080" y="1783080"/>
           <a:ext cx="10911534" cy="3657600"/>
         </p:xfrm>
         <a:graphic>
@@ -3601,7 +3721,7 @@
                       <a:r>
                         <a:rPr sz="1600" b="1">
                           <a:solidFill>
-                            <a:srgbClr val="FFFFFF"/>
+                            <a:srgbClr val="26231F"/>
                           </a:solidFill>
                         </a:rPr>
                         <a:t>구분</a:t>
@@ -3611,30 +3731,30 @@
                   <a:tcPr anchor="ctr" marL="73152" marR="73152">
                     <a:lnL w="9525" cap="flat" cmpd="sng" algn="ctr">
                       <a:solidFill>
-                        <a:srgbClr val="9D7D4D"/>
+                        <a:srgbClr val="D8B279"/>
                       </a:solidFill>
                       <a:prstDash val="solid"/>
                     </a:lnL>
                     <a:lnR w="9525" cap="flat" cmpd="sng" algn="ctr">
                       <a:solidFill>
-                        <a:srgbClr val="9D7D4D"/>
+                        <a:srgbClr val="D8B279"/>
                       </a:solidFill>
                       <a:prstDash val="solid"/>
                     </a:lnR>
                     <a:lnT w="9525" cap="flat" cmpd="sng" algn="ctr">
                       <a:solidFill>
-                        <a:srgbClr val="9D7D4D"/>
+                        <a:srgbClr val="D8B279"/>
                       </a:solidFill>
                       <a:prstDash val="solid"/>
                     </a:lnT>
                     <a:lnB w="9525" cap="flat" cmpd="sng" algn="ctr">
                       <a:solidFill>
-                        <a:srgbClr val="9D7D4D"/>
+                        <a:srgbClr val="D8B279"/>
                       </a:solidFill>
                       <a:prstDash val="solid"/>
                     </a:lnB>
                     <a:solidFill>
-                      <a:srgbClr val="9D7D4D"/>
+                      <a:srgbClr val="D8B279"/>
                     </a:solidFill>
                   </a:tcPr>
                 </a:tc>
@@ -3647,7 +3767,7 @@
                       <a:r>
                         <a:rPr sz="1600" b="1">
                           <a:solidFill>
-                            <a:srgbClr val="FFFFFF"/>
+                            <a:srgbClr val="26231F"/>
                           </a:solidFill>
                         </a:rPr>
                         <a:t>아버지</a:t>
@@ -3657,30 +3777,30 @@
                   <a:tcPr anchor="ctr" marL="73152" marR="73152">
                     <a:lnL w="9525" cap="flat" cmpd="sng" algn="ctr">
                       <a:solidFill>
-                        <a:srgbClr val="9D7D4D"/>
+                        <a:srgbClr val="D8B279"/>
                       </a:solidFill>
                       <a:prstDash val="solid"/>
                     </a:lnL>
                     <a:lnR w="9525" cap="flat" cmpd="sng" algn="ctr">
                       <a:solidFill>
-                        <a:srgbClr val="9D7D4D"/>
+                        <a:srgbClr val="D8B279"/>
                       </a:solidFill>
                       <a:prstDash val="solid"/>
                     </a:lnR>
                     <a:lnT w="9525" cap="flat" cmpd="sng" algn="ctr">
                       <a:solidFill>
-                        <a:srgbClr val="9D7D4D"/>
+                        <a:srgbClr val="D8B279"/>
                       </a:solidFill>
                       <a:prstDash val="solid"/>
                     </a:lnT>
                     <a:lnB w="9525" cap="flat" cmpd="sng" algn="ctr">
                       <a:solidFill>
-                        <a:srgbClr val="9D7D4D"/>
+                        <a:srgbClr val="D8B279"/>
                       </a:solidFill>
                       <a:prstDash val="solid"/>
                     </a:lnB>
                     <a:solidFill>
-                      <a:srgbClr val="9D7D4D"/>
+                      <a:srgbClr val="D8B279"/>
                     </a:solidFill>
                   </a:tcPr>
                 </a:tc>
@@ -3693,7 +3813,7 @@
                       <a:r>
                         <a:rPr sz="1600" b="1">
                           <a:solidFill>
-                            <a:srgbClr val="FFFFFF"/>
+                            <a:srgbClr val="26231F"/>
                           </a:solidFill>
                         </a:rPr>
                         <a:t>어머니</a:t>
@@ -3703,30 +3823,30 @@
                   <a:tcPr anchor="ctr" marL="73152" marR="73152">
                     <a:lnL w="9525" cap="flat" cmpd="sng" algn="ctr">
                       <a:solidFill>
-                        <a:srgbClr val="9D7D4D"/>
+                        <a:srgbClr val="D8B279"/>
                       </a:solidFill>
                       <a:prstDash val="solid"/>
                     </a:lnL>
                     <a:lnR w="9525" cap="flat" cmpd="sng" algn="ctr">
                       <a:solidFill>
-                        <a:srgbClr val="9D7D4D"/>
+                        <a:srgbClr val="D8B279"/>
                       </a:solidFill>
                       <a:prstDash val="solid"/>
                     </a:lnR>
                     <a:lnT w="9525" cap="flat" cmpd="sng" algn="ctr">
                       <a:solidFill>
-                        <a:srgbClr val="9D7D4D"/>
+                        <a:srgbClr val="D8B279"/>
                       </a:solidFill>
                       <a:prstDash val="solid"/>
                     </a:lnT>
                     <a:lnB w="9525" cap="flat" cmpd="sng" algn="ctr">
                       <a:solidFill>
-                        <a:srgbClr val="9D7D4D"/>
+                        <a:srgbClr val="D8B279"/>
                       </a:solidFill>
                       <a:prstDash val="solid"/>
                     </a:lnB>
                     <a:solidFill>
-                      <a:srgbClr val="9D7D4D"/>
+                      <a:srgbClr val="D8B279"/>
                     </a:solidFill>
                   </a:tcPr>
                 </a:tc>
@@ -3741,7 +3861,7 @@
                       <a:r>
                         <a:rPr sz="1600" b="1">
                           <a:solidFill>
-                            <a:srgbClr val="59472C"/>
+                            <a:srgbClr val="493B27"/>
                           </a:solidFill>
                         </a:rPr>
                         <a:t>성함</a:t>
@@ -3751,30 +3871,30 @@
                   <a:tcPr anchor="ctr" marL="73152" marR="73152">
                     <a:lnL w="9525" cap="flat" cmpd="sng" algn="ctr">
                       <a:solidFill>
-                        <a:srgbClr val="ECE3D4"/>
+                        <a:srgbClr val="F6E9D5"/>
                       </a:solidFill>
                       <a:prstDash val="solid"/>
                     </a:lnL>
                     <a:lnR w="9525" cap="flat" cmpd="sng" algn="ctr">
                       <a:solidFill>
-                        <a:srgbClr val="ECE3D4"/>
+                        <a:srgbClr val="F6E9D5"/>
                       </a:solidFill>
                       <a:prstDash val="solid"/>
                     </a:lnR>
                     <a:lnT w="9525" cap="flat" cmpd="sng" algn="ctr">
                       <a:solidFill>
-                        <a:srgbClr val="ECE3D4"/>
+                        <a:srgbClr val="F6E9D5"/>
                       </a:solidFill>
                       <a:prstDash val="solid"/>
                     </a:lnT>
                     <a:lnB w="9525" cap="flat" cmpd="sng" algn="ctr">
                       <a:solidFill>
-                        <a:srgbClr val="ECE3D4"/>
+                        <a:srgbClr val="F6E9D5"/>
                       </a:solidFill>
                       <a:prstDash val="solid"/>
                     </a:lnB>
                     <a:solidFill>
-                      <a:srgbClr val="ECE3D4"/>
+                      <a:srgbClr val="F6E9D5"/>
                     </a:solidFill>
                   </a:tcPr>
                 </a:tc>
@@ -3787,7 +3907,7 @@
                       <a:r>
                         <a:rPr sz="1600" b="0">
                           <a:solidFill>
-                            <a:srgbClr val="2B2B2B"/>
+                            <a:srgbClr val="26231F"/>
                           </a:solidFill>
                         </a:rPr>
                         <a:t/>
@@ -3797,25 +3917,25 @@
                   <a:tcPr anchor="ctr" marL="73152" marR="73152">
                     <a:lnL w="9525" cap="flat" cmpd="sng" algn="ctr">
                       <a:solidFill>
-                        <a:srgbClr val="ECE3D4"/>
+                        <a:srgbClr val="F6E9D5"/>
                       </a:solidFill>
                       <a:prstDash val="solid"/>
                     </a:lnL>
                     <a:lnR w="9525" cap="flat" cmpd="sng" algn="ctr">
                       <a:solidFill>
-                        <a:srgbClr val="ECE3D4"/>
+                        <a:srgbClr val="F6E9D5"/>
                       </a:solidFill>
                       <a:prstDash val="solid"/>
                     </a:lnR>
                     <a:lnT w="9525" cap="flat" cmpd="sng" algn="ctr">
                       <a:solidFill>
-                        <a:srgbClr val="ECE3D4"/>
+                        <a:srgbClr val="F6E9D5"/>
                       </a:solidFill>
                       <a:prstDash val="solid"/>
                     </a:lnT>
                     <a:lnB w="9525" cap="flat" cmpd="sng" algn="ctr">
                       <a:solidFill>
-                        <a:srgbClr val="ECE3D4"/>
+                        <a:srgbClr val="F6E9D5"/>
                       </a:solidFill>
                       <a:prstDash val="solid"/>
                     </a:lnB>
@@ -3833,7 +3953,7 @@
                       <a:r>
                         <a:rPr sz="1600" b="0">
                           <a:solidFill>
-                            <a:srgbClr val="2B2B2B"/>
+                            <a:srgbClr val="26231F"/>
                           </a:solidFill>
                         </a:rPr>
                         <a:t/>
@@ -3843,25 +3963,25 @@
                   <a:tcPr anchor="ctr" marL="73152" marR="73152">
                     <a:lnL w="9525" cap="flat" cmpd="sng" algn="ctr">
                       <a:solidFill>
-                        <a:srgbClr val="ECE3D4"/>
+                        <a:srgbClr val="F6E9D5"/>
                       </a:solidFill>
                       <a:prstDash val="solid"/>
                     </a:lnL>
                     <a:lnR w="9525" cap="flat" cmpd="sng" algn="ctr">
                       <a:solidFill>
-                        <a:srgbClr val="ECE3D4"/>
+                        <a:srgbClr val="F6E9D5"/>
                       </a:solidFill>
                       <a:prstDash val="solid"/>
                     </a:lnR>
                     <a:lnT w="9525" cap="flat" cmpd="sng" algn="ctr">
                       <a:solidFill>
-                        <a:srgbClr val="ECE3D4"/>
+                        <a:srgbClr val="F6E9D5"/>
                       </a:solidFill>
                       <a:prstDash val="solid"/>
                     </a:lnT>
                     <a:lnB w="9525" cap="flat" cmpd="sng" algn="ctr">
                       <a:solidFill>
-                        <a:srgbClr val="ECE3D4"/>
+                        <a:srgbClr val="F6E9D5"/>
                       </a:solidFill>
                       <a:prstDash val="solid"/>
                     </a:lnB>
@@ -3881,7 +4001,7 @@
                       <a:r>
                         <a:rPr sz="1600" b="1">
                           <a:solidFill>
-                            <a:srgbClr val="59472C"/>
+                            <a:srgbClr val="493B27"/>
                           </a:solidFill>
                         </a:rPr>
                         <a:t>연세</a:t>
@@ -3891,30 +4011,30 @@
                   <a:tcPr anchor="ctr" marL="73152" marR="73152">
                     <a:lnL w="9525" cap="flat" cmpd="sng" algn="ctr">
                       <a:solidFill>
-                        <a:srgbClr val="ECE3D4"/>
+                        <a:srgbClr val="F6E9D5"/>
                       </a:solidFill>
                       <a:prstDash val="solid"/>
                     </a:lnL>
                     <a:lnR w="9525" cap="flat" cmpd="sng" algn="ctr">
                       <a:solidFill>
-                        <a:srgbClr val="ECE3D4"/>
+                        <a:srgbClr val="F6E9D5"/>
                       </a:solidFill>
                       <a:prstDash val="solid"/>
                     </a:lnR>
                     <a:lnT w="9525" cap="flat" cmpd="sng" algn="ctr">
                       <a:solidFill>
-                        <a:srgbClr val="ECE3D4"/>
+                        <a:srgbClr val="F6E9D5"/>
                       </a:solidFill>
                       <a:prstDash val="solid"/>
                     </a:lnT>
                     <a:lnB w="9525" cap="flat" cmpd="sng" algn="ctr">
                       <a:solidFill>
-                        <a:srgbClr val="ECE3D4"/>
+                        <a:srgbClr val="F6E9D5"/>
                       </a:solidFill>
                       <a:prstDash val="solid"/>
                     </a:lnB>
                     <a:solidFill>
-                      <a:srgbClr val="ECE3D4"/>
+                      <a:srgbClr val="F6E9D5"/>
                     </a:solidFill>
                   </a:tcPr>
                 </a:tc>
@@ -3927,7 +4047,7 @@
                       <a:r>
                         <a:rPr sz="1600" b="0">
                           <a:solidFill>
-                            <a:srgbClr val="2B2B2B"/>
+                            <a:srgbClr val="26231F"/>
                           </a:solidFill>
                         </a:rPr>
                         <a:t/>
@@ -3937,30 +4057,30 @@
                   <a:tcPr anchor="ctr" marL="73152" marR="73152">
                     <a:lnL w="9525" cap="flat" cmpd="sng" algn="ctr">
                       <a:solidFill>
-                        <a:srgbClr val="ECE3D4"/>
+                        <a:srgbClr val="F6E9D5"/>
                       </a:solidFill>
                       <a:prstDash val="solid"/>
                     </a:lnL>
                     <a:lnR w="9525" cap="flat" cmpd="sng" algn="ctr">
                       <a:solidFill>
-                        <a:srgbClr val="ECE3D4"/>
+                        <a:srgbClr val="F6E9D5"/>
                       </a:solidFill>
                       <a:prstDash val="solid"/>
                     </a:lnR>
                     <a:lnT w="9525" cap="flat" cmpd="sng" algn="ctr">
                       <a:solidFill>
-                        <a:srgbClr val="ECE3D4"/>
+                        <a:srgbClr val="F6E9D5"/>
                       </a:solidFill>
                       <a:prstDash val="solid"/>
                     </a:lnT>
                     <a:lnB w="9525" cap="flat" cmpd="sng" algn="ctr">
                       <a:solidFill>
-                        <a:srgbClr val="ECE3D4"/>
+                        <a:srgbClr val="F6E9D5"/>
                       </a:solidFill>
                       <a:prstDash val="solid"/>
                     </a:lnB>
                     <a:solidFill>
-                      <a:srgbClr val="F8F5F1"/>
+                      <a:srgbClr val="FBF5EC"/>
                     </a:solidFill>
                   </a:tcPr>
                 </a:tc>
@@ -3973,7 +4093,7 @@
                       <a:r>
                         <a:rPr sz="1600" b="0">
                           <a:solidFill>
-                            <a:srgbClr val="2B2B2B"/>
+                            <a:srgbClr val="26231F"/>
                           </a:solidFill>
                         </a:rPr>
                         <a:t/>
@@ -3983,30 +4103,30 @@
                   <a:tcPr anchor="ctr" marL="73152" marR="73152">
                     <a:lnL w="9525" cap="flat" cmpd="sng" algn="ctr">
                       <a:solidFill>
-                        <a:srgbClr val="ECE3D4"/>
+                        <a:srgbClr val="F6E9D5"/>
                       </a:solidFill>
                       <a:prstDash val="solid"/>
                     </a:lnL>
                     <a:lnR w="9525" cap="flat" cmpd="sng" algn="ctr">
                       <a:solidFill>
-                        <a:srgbClr val="ECE3D4"/>
+                        <a:srgbClr val="F6E9D5"/>
                       </a:solidFill>
                       <a:prstDash val="solid"/>
                     </a:lnR>
                     <a:lnT w="9525" cap="flat" cmpd="sng" algn="ctr">
                       <a:solidFill>
-                        <a:srgbClr val="ECE3D4"/>
+                        <a:srgbClr val="F6E9D5"/>
                       </a:solidFill>
                       <a:prstDash val="solid"/>
                     </a:lnT>
                     <a:lnB w="9525" cap="flat" cmpd="sng" algn="ctr">
                       <a:solidFill>
-                        <a:srgbClr val="ECE3D4"/>
+                        <a:srgbClr val="F6E9D5"/>
                       </a:solidFill>
                       <a:prstDash val="solid"/>
                     </a:lnB>
                     <a:solidFill>
-                      <a:srgbClr val="F8F5F1"/>
+                      <a:srgbClr val="FBF5EC"/>
                     </a:solidFill>
                   </a:tcPr>
                 </a:tc>
@@ -4021,7 +4141,7 @@
                       <a:r>
                         <a:rPr sz="1600" b="1">
                           <a:solidFill>
-                            <a:srgbClr val="59472C"/>
+                            <a:srgbClr val="493B27"/>
                           </a:solidFill>
                         </a:rPr>
                         <a:t>건강 상태 메모</a:t>
@@ -4031,30 +4151,30 @@
                   <a:tcPr anchor="ctr" marL="73152" marR="73152">
                     <a:lnL w="9525" cap="flat" cmpd="sng" algn="ctr">
                       <a:solidFill>
-                        <a:srgbClr val="ECE3D4"/>
+                        <a:srgbClr val="F6E9D5"/>
                       </a:solidFill>
                       <a:prstDash val="solid"/>
                     </a:lnL>
                     <a:lnR w="9525" cap="flat" cmpd="sng" algn="ctr">
                       <a:solidFill>
-                        <a:srgbClr val="ECE3D4"/>
+                        <a:srgbClr val="F6E9D5"/>
                       </a:solidFill>
                       <a:prstDash val="solid"/>
                     </a:lnR>
                     <a:lnT w="9525" cap="flat" cmpd="sng" algn="ctr">
                       <a:solidFill>
-                        <a:srgbClr val="ECE3D4"/>
+                        <a:srgbClr val="F6E9D5"/>
                       </a:solidFill>
                       <a:prstDash val="solid"/>
                     </a:lnT>
                     <a:lnB w="9525" cap="flat" cmpd="sng" algn="ctr">
                       <a:solidFill>
-                        <a:srgbClr val="ECE3D4"/>
+                        <a:srgbClr val="F6E9D5"/>
                       </a:solidFill>
                       <a:prstDash val="solid"/>
                     </a:lnB>
                     <a:solidFill>
-                      <a:srgbClr val="ECE3D4"/>
+                      <a:srgbClr val="F6E9D5"/>
                     </a:solidFill>
                   </a:tcPr>
                 </a:tc>
@@ -4067,7 +4187,7 @@
                       <a:r>
                         <a:rPr sz="1600" b="0">
                           <a:solidFill>
-                            <a:srgbClr val="2B2B2B"/>
+                            <a:srgbClr val="26231F"/>
                           </a:solidFill>
                         </a:rPr>
                         <a:t/>
@@ -4077,25 +4197,25 @@
                   <a:tcPr anchor="ctr" marL="73152" marR="73152">
                     <a:lnL w="9525" cap="flat" cmpd="sng" algn="ctr">
                       <a:solidFill>
-                        <a:srgbClr val="ECE3D4"/>
+                        <a:srgbClr val="F6E9D5"/>
                       </a:solidFill>
                       <a:prstDash val="solid"/>
                     </a:lnL>
                     <a:lnR w="9525" cap="flat" cmpd="sng" algn="ctr">
                       <a:solidFill>
-                        <a:srgbClr val="ECE3D4"/>
+                        <a:srgbClr val="F6E9D5"/>
                       </a:solidFill>
                       <a:prstDash val="solid"/>
                     </a:lnR>
                     <a:lnT w="9525" cap="flat" cmpd="sng" algn="ctr">
                       <a:solidFill>
-                        <a:srgbClr val="ECE3D4"/>
+                        <a:srgbClr val="F6E9D5"/>
                       </a:solidFill>
                       <a:prstDash val="solid"/>
                     </a:lnT>
                     <a:lnB w="9525" cap="flat" cmpd="sng" algn="ctr">
                       <a:solidFill>
-                        <a:srgbClr val="ECE3D4"/>
+                        <a:srgbClr val="F6E9D5"/>
                       </a:solidFill>
                       <a:prstDash val="solid"/>
                     </a:lnB>
@@ -4113,7 +4233,7 @@
                       <a:r>
                         <a:rPr sz="1600" b="0">
                           <a:solidFill>
-                            <a:srgbClr val="2B2B2B"/>
+                            <a:srgbClr val="26231F"/>
                           </a:solidFill>
                         </a:rPr>
                         <a:t/>
@@ -4123,25 +4243,25 @@
                   <a:tcPr anchor="ctr" marL="73152" marR="73152">
                     <a:lnL w="9525" cap="flat" cmpd="sng" algn="ctr">
                       <a:solidFill>
-                        <a:srgbClr val="ECE3D4"/>
+                        <a:srgbClr val="F6E9D5"/>
                       </a:solidFill>
                       <a:prstDash val="solid"/>
                     </a:lnL>
                     <a:lnR w="9525" cap="flat" cmpd="sng" algn="ctr">
                       <a:solidFill>
-                        <a:srgbClr val="ECE3D4"/>
+                        <a:srgbClr val="F6E9D5"/>
                       </a:solidFill>
                       <a:prstDash val="solid"/>
                     </a:lnR>
                     <a:lnT w="9525" cap="flat" cmpd="sng" algn="ctr">
                       <a:solidFill>
-                        <a:srgbClr val="ECE3D4"/>
+                        <a:srgbClr val="F6E9D5"/>
                       </a:solidFill>
                       <a:prstDash val="solid"/>
                     </a:lnT>
                     <a:lnB w="9525" cap="flat" cmpd="sng" algn="ctr">
                       <a:solidFill>
-                        <a:srgbClr val="ECE3D4"/>
+                        <a:srgbClr val="F6E9D5"/>
                       </a:solidFill>
                       <a:prstDash val="solid"/>
                     </a:lnB>
@@ -4161,7 +4281,7 @@
                       <a:r>
                         <a:rPr sz="1600" b="1">
                           <a:solidFill>
-                            <a:srgbClr val="59472C"/>
+                            <a:srgbClr val="493B27"/>
                           </a:solidFill>
                         </a:rPr>
                         <a:t>함께 확인할 것</a:t>
@@ -4171,30 +4291,30 @@
                   <a:tcPr anchor="ctr" marL="73152" marR="73152">
                     <a:lnL w="9525" cap="flat" cmpd="sng" algn="ctr">
                       <a:solidFill>
-                        <a:srgbClr val="ECE3D4"/>
+                        <a:srgbClr val="F6E9D5"/>
                       </a:solidFill>
                       <a:prstDash val="solid"/>
                     </a:lnL>
                     <a:lnR w="9525" cap="flat" cmpd="sng" algn="ctr">
                       <a:solidFill>
-                        <a:srgbClr val="ECE3D4"/>
+                        <a:srgbClr val="F6E9D5"/>
                       </a:solidFill>
                       <a:prstDash val="solid"/>
                     </a:lnR>
                     <a:lnT w="9525" cap="flat" cmpd="sng" algn="ctr">
                       <a:solidFill>
-                        <a:srgbClr val="ECE3D4"/>
+                        <a:srgbClr val="F6E9D5"/>
                       </a:solidFill>
                       <a:prstDash val="solid"/>
                     </a:lnT>
                     <a:lnB w="9525" cap="flat" cmpd="sng" algn="ctr">
                       <a:solidFill>
-                        <a:srgbClr val="ECE3D4"/>
+                        <a:srgbClr val="F6E9D5"/>
                       </a:solidFill>
                       <a:prstDash val="solid"/>
                     </a:lnB>
                     <a:solidFill>
-                      <a:srgbClr val="ECE3D4"/>
+                      <a:srgbClr val="F6E9D5"/>
                     </a:solidFill>
                   </a:tcPr>
                 </a:tc>
@@ -4207,7 +4327,7 @@
                       <a:r>
                         <a:rPr sz="1600" b="0">
                           <a:solidFill>
-                            <a:srgbClr val="2B2B2B"/>
+                            <a:srgbClr val="26231F"/>
                           </a:solidFill>
                         </a:rPr>
                         <a:t/>
@@ -4217,30 +4337,30 @@
                   <a:tcPr anchor="ctr" marL="73152" marR="73152">
                     <a:lnL w="9525" cap="flat" cmpd="sng" algn="ctr">
                       <a:solidFill>
-                        <a:srgbClr val="ECE3D4"/>
+                        <a:srgbClr val="F6E9D5"/>
                       </a:solidFill>
                       <a:prstDash val="solid"/>
                     </a:lnL>
                     <a:lnR w="9525" cap="flat" cmpd="sng" algn="ctr">
                       <a:solidFill>
-                        <a:srgbClr val="ECE3D4"/>
+                        <a:srgbClr val="F6E9D5"/>
                       </a:solidFill>
                       <a:prstDash val="solid"/>
                     </a:lnR>
                     <a:lnT w="9525" cap="flat" cmpd="sng" algn="ctr">
                       <a:solidFill>
-                        <a:srgbClr val="ECE3D4"/>
+                        <a:srgbClr val="F6E9D5"/>
                       </a:solidFill>
                       <a:prstDash val="solid"/>
                     </a:lnT>
                     <a:lnB w="9525" cap="flat" cmpd="sng" algn="ctr">
                       <a:solidFill>
-                        <a:srgbClr val="ECE3D4"/>
+                        <a:srgbClr val="F6E9D5"/>
                       </a:solidFill>
                       <a:prstDash val="solid"/>
                     </a:lnB>
                     <a:solidFill>
-                      <a:srgbClr val="F8F5F1"/>
+                      <a:srgbClr val="FBF5EC"/>
                     </a:solidFill>
                   </a:tcPr>
                 </a:tc>
@@ -4253,7 +4373,7 @@
                       <a:r>
                         <a:rPr sz="1600" b="0">
                           <a:solidFill>
-                            <a:srgbClr val="2B2B2B"/>
+                            <a:srgbClr val="26231F"/>
                           </a:solidFill>
                         </a:rPr>
                         <a:t/>
@@ -4263,30 +4383,30 @@
                   <a:tcPr anchor="ctr" marL="73152" marR="73152">
                     <a:lnL w="9525" cap="flat" cmpd="sng" algn="ctr">
                       <a:solidFill>
-                        <a:srgbClr val="ECE3D4"/>
+                        <a:srgbClr val="F6E9D5"/>
                       </a:solidFill>
                       <a:prstDash val="solid"/>
                     </a:lnL>
                     <a:lnR w="9525" cap="flat" cmpd="sng" algn="ctr">
                       <a:solidFill>
-                        <a:srgbClr val="ECE3D4"/>
+                        <a:srgbClr val="F6E9D5"/>
                       </a:solidFill>
                       <a:prstDash val="solid"/>
                     </a:lnR>
                     <a:lnT w="9525" cap="flat" cmpd="sng" algn="ctr">
                       <a:solidFill>
-                        <a:srgbClr val="ECE3D4"/>
+                        <a:srgbClr val="F6E9D5"/>
                       </a:solidFill>
                       <a:prstDash val="solid"/>
                     </a:lnT>
                     <a:lnB w="9525" cap="flat" cmpd="sng" algn="ctr">
                       <a:solidFill>
-                        <a:srgbClr val="ECE3D4"/>
+                        <a:srgbClr val="F6E9D5"/>
                       </a:solidFill>
                       <a:prstDash val="solid"/>
                     </a:lnB>
                     <a:solidFill>
-                      <a:srgbClr val="F8F5F1"/>
+                      <a:srgbClr val="FBF5EC"/>
                     </a:solidFill>
                   </a:tcPr>
                 </a:tc>
@@ -4309,7 +4429,7 @@
     <p:bg>
       <p:bgPr>
         <a:solidFill>
-          <a:srgbClr val="FFFFFF"/>
+          <a:srgbClr val="F6E9D5"/>
         </a:solidFill>
         <a:effectLst/>
       </p:bgPr>
@@ -4329,14 +4449,16 @@
         </p:nvSpPr>
         <p:spPr>
           <a:xfrm>
-            <a:off x="-182880" y="6144768"/>
-            <a:ext cx="12557455" cy="731520"/>
-          </a:xfrm>
-          <a:prstGeom prst="wave">
-            <a:avLst/>
+            <a:off x="640080" y="566928"/>
+            <a:ext cx="64008" cy="868680"/>
+          </a:xfrm>
+          <a:prstGeom prst="roundRect">
+            <a:avLst>
+              <a:gd name="adj" fmla="val 50000"/>
+            </a:avLst>
           </a:prstGeom>
           <a:solidFill>
-            <a:srgbClr val="ECE3D4"/>
+            <a:srgbClr val="D8B279"/>
           </a:solidFill>
           <a:ln>
             <a:noFill/>
@@ -4352,20 +4474,58 @@
       </p:sp>
       <p:sp>
         <p:nvSpPr>
-          <p:cNvPr id="4" name="장식"/>
+          <p:cNvPr id="4" name="상단 라벨"/>
+          <p:cNvSpPr txBox="1"/>
+          <p:nvPr/>
+        </p:nvSpPr>
+        <p:spPr>
+          <a:xfrm>
+            <a:off x="868680" y="274320"/>
+            <a:ext cx="5486400" cy="274320"/>
+          </a:xfrm>
+          <a:prstGeom prst="rect">
+            <a:avLst/>
+          </a:prstGeom>
+          <a:noFill/>
+        </p:spPr>
+        <p:txBody>
+          <a:bodyPr wrap="square" lIns="54864" rIns="54864" tIns="27432" bIns="27432" anchor="ctr">
+            <a:noAutofit/>
+          </a:bodyPr>
+          <a:lstStyle/>
+          <a:p>
+            <a:pPr algn="l">
+              <a:lnSpc>
+                <a:spcPct val="115000"/>
+              </a:lnSpc>
+            </a:pPr>
+            <a:r>
+              <a:rPr sz="900" b="1" i="0" spc="250">
+                <a:solidFill>
+                  <a:srgbClr val="8E8780"/>
+                </a:solidFill>
+              </a:rPr>
+              <a:t>INSURANCE CHECK</a:t>
+            </a:r>
+          </a:p>
+        </p:txBody>
+      </p:sp>
+      <p:sp>
+        <p:nvSpPr>
+          <p:cNvPr id="5" name="포인트"/>
           <p:cNvSpPr/>
           <p:nvPr/>
         </p:nvSpPr>
         <p:spPr>
           <a:xfrm>
-            <a:off x="-182880" y="6400800"/>
-            <a:ext cx="12557455" cy="502920"/>
-          </a:xfrm>
-          <a:prstGeom prst="wave">
+            <a:off x="11167567" y="667512"/>
+            <a:ext cx="310896" cy="310896"/>
+          </a:xfrm>
+          <a:prstGeom prst="ellipse">
             <a:avLst/>
           </a:prstGeom>
           <a:solidFill>
-            <a:srgbClr val="9D7D4D"/>
+            <a:srgbClr val="EBD2AD"/>
           </a:solidFill>
           <a:ln>
             <a:noFill/>
@@ -4391,8 +4551,8 @@
         </p:nvSpPr>
         <p:spPr>
           <a:xfrm>
-            <a:off x="640080" y="457200"/>
-            <a:ext cx="9722815" cy="868680"/>
+            <a:off x="868680" y="566928"/>
+            <a:ext cx="9448495" cy="868680"/>
           </a:xfrm>
         </p:spPr>
         <p:txBody>
@@ -4409,7 +4569,7 @@
             <a:r>
               <a:rPr sz="3000" b="1" i="0">
                 <a:solidFill>
-                  <a:srgbClr val="59472C"/>
+                  <a:srgbClr val="26231F"/>
                 </a:solidFill>
               </a:rPr>
               <a:t>가입한 보험 목록</a:t>
@@ -4419,14 +4579,14 @@
       </p:sp>
       <p:graphicFrame>
         <p:nvGraphicFramePr>
-          <p:cNvPr id="5" name="표"/>
+          <p:cNvPr id="6" name="표"/>
           <p:cNvGraphicFramePr>
             <a:graphicFrameLocks noGrp="1"/>
           </p:cNvGraphicFramePr>
           <p:nvPr/>
         </p:nvGraphicFramePr>
         <p:xfrm>
-          <a:off x="640080" y="1554480"/>
+          <a:off x="640080" y="1783080"/>
           <a:ext cx="10911535" cy="4224528"/>
         </p:xfrm>
         <a:graphic>
@@ -4452,7 +4612,7 @@
                       <a:r>
                         <a:rPr sz="1400" b="1">
                           <a:solidFill>
-                            <a:srgbClr val="FFFFFF"/>
+                            <a:srgbClr val="26231F"/>
                           </a:solidFill>
                         </a:rPr>
                         <a:t>보험회사</a:t>
@@ -4462,30 +4622,30 @@
                   <a:tcPr anchor="ctr" marL="73152" marR="73152">
                     <a:lnL w="9525" cap="flat" cmpd="sng" algn="ctr">
                       <a:solidFill>
-                        <a:srgbClr val="9D7D4D"/>
+                        <a:srgbClr val="D8B279"/>
                       </a:solidFill>
                       <a:prstDash val="solid"/>
                     </a:lnL>
                     <a:lnR w="9525" cap="flat" cmpd="sng" algn="ctr">
                       <a:solidFill>
-                        <a:srgbClr val="9D7D4D"/>
+                        <a:srgbClr val="D8B279"/>
                       </a:solidFill>
                       <a:prstDash val="solid"/>
                     </a:lnR>
                     <a:lnT w="9525" cap="flat" cmpd="sng" algn="ctr">
                       <a:solidFill>
-                        <a:srgbClr val="9D7D4D"/>
+                        <a:srgbClr val="D8B279"/>
                       </a:solidFill>
                       <a:prstDash val="solid"/>
                     </a:lnT>
                     <a:lnB w="9525" cap="flat" cmpd="sng" algn="ctr">
                       <a:solidFill>
-                        <a:srgbClr val="9D7D4D"/>
+                        <a:srgbClr val="D8B279"/>
                       </a:solidFill>
                       <a:prstDash val="solid"/>
                     </a:lnB>
                     <a:solidFill>
-                      <a:srgbClr val="9D7D4D"/>
+                      <a:srgbClr val="D8B279"/>
                     </a:solidFill>
                   </a:tcPr>
                 </a:tc>
@@ -4498,7 +4658,7 @@
                       <a:r>
                         <a:rPr sz="1400" b="1">
                           <a:solidFill>
-                            <a:srgbClr val="FFFFFF"/>
+                            <a:srgbClr val="26231F"/>
                           </a:solidFill>
                         </a:rPr>
                         <a:t>상품명</a:t>
@@ -4508,30 +4668,30 @@
                   <a:tcPr anchor="ctr" marL="73152" marR="73152">
                     <a:lnL w="9525" cap="flat" cmpd="sng" algn="ctr">
                       <a:solidFill>
-                        <a:srgbClr val="9D7D4D"/>
+                        <a:srgbClr val="D8B279"/>
                       </a:solidFill>
                       <a:prstDash val="solid"/>
                     </a:lnL>
                     <a:lnR w="9525" cap="flat" cmpd="sng" algn="ctr">
                       <a:solidFill>
-                        <a:srgbClr val="9D7D4D"/>
+                        <a:srgbClr val="D8B279"/>
                       </a:solidFill>
                       <a:prstDash val="solid"/>
                     </a:lnR>
                     <a:lnT w="9525" cap="flat" cmpd="sng" algn="ctr">
                       <a:solidFill>
-                        <a:srgbClr val="9D7D4D"/>
+                        <a:srgbClr val="D8B279"/>
                       </a:solidFill>
                       <a:prstDash val="solid"/>
                     </a:lnT>
                     <a:lnB w="9525" cap="flat" cmpd="sng" algn="ctr">
                       <a:solidFill>
-                        <a:srgbClr val="9D7D4D"/>
+                        <a:srgbClr val="D8B279"/>
                       </a:solidFill>
                       <a:prstDash val="solid"/>
                     </a:lnB>
                     <a:solidFill>
-                      <a:srgbClr val="9D7D4D"/>
+                      <a:srgbClr val="D8B279"/>
                     </a:solidFill>
                   </a:tcPr>
                 </a:tc>
@@ -4544,7 +4704,7 @@
                       <a:r>
                         <a:rPr sz="1400" b="1">
                           <a:solidFill>
-                            <a:srgbClr val="FFFFFF"/>
+                            <a:srgbClr val="26231F"/>
                           </a:solidFill>
                         </a:rPr>
                         <a:t>종류</a:t>
@@ -4554,30 +4714,30 @@
                   <a:tcPr anchor="ctr" marL="73152" marR="73152">
                     <a:lnL w="9525" cap="flat" cmpd="sng" algn="ctr">
                       <a:solidFill>
-                        <a:srgbClr val="9D7D4D"/>
+                        <a:srgbClr val="D8B279"/>
                       </a:solidFill>
                       <a:prstDash val="solid"/>
                     </a:lnL>
                     <a:lnR w="9525" cap="flat" cmpd="sng" algn="ctr">
                       <a:solidFill>
-                        <a:srgbClr val="9D7D4D"/>
+                        <a:srgbClr val="D8B279"/>
                       </a:solidFill>
                       <a:prstDash val="solid"/>
                     </a:lnR>
                     <a:lnT w="9525" cap="flat" cmpd="sng" algn="ctr">
                       <a:solidFill>
-                        <a:srgbClr val="9D7D4D"/>
+                        <a:srgbClr val="D8B279"/>
                       </a:solidFill>
                       <a:prstDash val="solid"/>
                     </a:lnT>
                     <a:lnB w="9525" cap="flat" cmpd="sng" algn="ctr">
                       <a:solidFill>
-                        <a:srgbClr val="9D7D4D"/>
+                        <a:srgbClr val="D8B279"/>
                       </a:solidFill>
                       <a:prstDash val="solid"/>
                     </a:lnB>
                     <a:solidFill>
-                      <a:srgbClr val="9D7D4D"/>
+                      <a:srgbClr val="D8B279"/>
                     </a:solidFill>
                   </a:tcPr>
                 </a:tc>
@@ -4590,7 +4750,7 @@
                       <a:r>
                         <a:rPr sz="1400" b="1">
                           <a:solidFill>
-                            <a:srgbClr val="FFFFFF"/>
+                            <a:srgbClr val="26231F"/>
                           </a:solidFill>
                         </a:rPr>
                         <a:t>만기일</a:t>
@@ -4600,30 +4760,30 @@
                   <a:tcPr anchor="ctr" marL="73152" marR="73152">
                     <a:lnL w="9525" cap="flat" cmpd="sng" algn="ctr">
                       <a:solidFill>
-                        <a:srgbClr val="9D7D4D"/>
+                        <a:srgbClr val="D8B279"/>
                       </a:solidFill>
                       <a:prstDash val="solid"/>
                     </a:lnL>
                     <a:lnR w="9525" cap="flat" cmpd="sng" algn="ctr">
                       <a:solidFill>
-                        <a:srgbClr val="9D7D4D"/>
+                        <a:srgbClr val="D8B279"/>
                       </a:solidFill>
                       <a:prstDash val="solid"/>
                     </a:lnR>
                     <a:lnT w="9525" cap="flat" cmpd="sng" algn="ctr">
                       <a:solidFill>
-                        <a:srgbClr val="9D7D4D"/>
+                        <a:srgbClr val="D8B279"/>
                       </a:solidFill>
                       <a:prstDash val="solid"/>
                     </a:lnT>
                     <a:lnB w="9525" cap="flat" cmpd="sng" algn="ctr">
                       <a:solidFill>
-                        <a:srgbClr val="9D7D4D"/>
+                        <a:srgbClr val="D8B279"/>
                       </a:solidFill>
                       <a:prstDash val="solid"/>
                     </a:lnB>
                     <a:solidFill>
-                      <a:srgbClr val="9D7D4D"/>
+                      <a:srgbClr val="D8B279"/>
                     </a:solidFill>
                   </a:tcPr>
                 </a:tc>
@@ -4636,7 +4796,7 @@
                       <a:r>
                         <a:rPr sz="1400" b="1">
                           <a:solidFill>
-                            <a:srgbClr val="FFFFFF"/>
+                            <a:srgbClr val="26231F"/>
                           </a:solidFill>
                         </a:rPr>
                         <a:t>월 보험료</a:t>
@@ -4646,30 +4806,30 @@
                   <a:tcPr anchor="ctr" marL="73152" marR="73152">
                     <a:lnL w="9525" cap="flat" cmpd="sng" algn="ctr">
                       <a:solidFill>
-                        <a:srgbClr val="9D7D4D"/>
+                        <a:srgbClr val="D8B279"/>
                       </a:solidFill>
                       <a:prstDash val="solid"/>
                     </a:lnL>
                     <a:lnR w="9525" cap="flat" cmpd="sng" algn="ctr">
                       <a:solidFill>
-                        <a:srgbClr val="9D7D4D"/>
+                        <a:srgbClr val="D8B279"/>
                       </a:solidFill>
                       <a:prstDash val="solid"/>
                     </a:lnR>
                     <a:lnT w="9525" cap="flat" cmpd="sng" algn="ctr">
                       <a:solidFill>
-                        <a:srgbClr val="9D7D4D"/>
+                        <a:srgbClr val="D8B279"/>
                       </a:solidFill>
                       <a:prstDash val="solid"/>
                     </a:lnT>
                     <a:lnB w="9525" cap="flat" cmpd="sng" algn="ctr">
                       <a:solidFill>
-                        <a:srgbClr val="9D7D4D"/>
+                        <a:srgbClr val="D8B279"/>
                       </a:solidFill>
                       <a:prstDash val="solid"/>
                     </a:lnB>
                     <a:solidFill>
-                      <a:srgbClr val="9D7D4D"/>
+                      <a:srgbClr val="D8B279"/>
                     </a:solidFill>
                   </a:tcPr>
                 </a:tc>
@@ -4684,7 +4844,7 @@
                       <a:r>
                         <a:rPr sz="1400" b="0">
                           <a:solidFill>
-                            <a:srgbClr val="2B2B2B"/>
+                            <a:srgbClr val="26231F"/>
                           </a:solidFill>
                         </a:rPr>
                         <a:t/>
@@ -4694,25 +4854,25 @@
                   <a:tcPr anchor="ctr" marL="73152" marR="73152">
                     <a:lnL w="9525" cap="flat" cmpd="sng" algn="ctr">
                       <a:solidFill>
-                        <a:srgbClr val="ECE3D4"/>
+                        <a:srgbClr val="F6E9D5"/>
                       </a:solidFill>
                       <a:prstDash val="solid"/>
                     </a:lnL>
                     <a:lnR w="9525" cap="flat" cmpd="sng" algn="ctr">
                       <a:solidFill>
-                        <a:srgbClr val="ECE3D4"/>
+                        <a:srgbClr val="F6E9D5"/>
                       </a:solidFill>
                       <a:prstDash val="solid"/>
                     </a:lnR>
                     <a:lnT w="9525" cap="flat" cmpd="sng" algn="ctr">
                       <a:solidFill>
-                        <a:srgbClr val="ECE3D4"/>
+                        <a:srgbClr val="F6E9D5"/>
                       </a:solidFill>
                       <a:prstDash val="solid"/>
                     </a:lnT>
                     <a:lnB w="9525" cap="flat" cmpd="sng" algn="ctr">
                       <a:solidFill>
-                        <a:srgbClr val="ECE3D4"/>
+                        <a:srgbClr val="F6E9D5"/>
                       </a:solidFill>
                       <a:prstDash val="solid"/>
                     </a:lnB>
@@ -4730,7 +4890,7 @@
                       <a:r>
                         <a:rPr sz="1400" b="0">
                           <a:solidFill>
-                            <a:srgbClr val="2B2B2B"/>
+                            <a:srgbClr val="26231F"/>
                           </a:solidFill>
                         </a:rPr>
                         <a:t/>
@@ -4740,25 +4900,25 @@
                   <a:tcPr anchor="ctr" marL="73152" marR="73152">
                     <a:lnL w="9525" cap="flat" cmpd="sng" algn="ctr">
                       <a:solidFill>
-                        <a:srgbClr val="ECE3D4"/>
+                        <a:srgbClr val="F6E9D5"/>
                       </a:solidFill>
                       <a:prstDash val="solid"/>
                     </a:lnL>
                     <a:lnR w="9525" cap="flat" cmpd="sng" algn="ctr">
                       <a:solidFill>
-                        <a:srgbClr val="ECE3D4"/>
+                        <a:srgbClr val="F6E9D5"/>
                       </a:solidFill>
                       <a:prstDash val="solid"/>
                     </a:lnR>
                     <a:lnT w="9525" cap="flat" cmpd="sng" algn="ctr">
                       <a:solidFill>
-                        <a:srgbClr val="ECE3D4"/>
+                        <a:srgbClr val="F6E9D5"/>
                       </a:solidFill>
                       <a:prstDash val="solid"/>
                     </a:lnT>
                     <a:lnB w="9525" cap="flat" cmpd="sng" algn="ctr">
                       <a:solidFill>
-                        <a:srgbClr val="ECE3D4"/>
+                        <a:srgbClr val="F6E9D5"/>
                       </a:solidFill>
                       <a:prstDash val="solid"/>
                     </a:lnB>
@@ -4776,7 +4936,7 @@
                       <a:r>
                         <a:rPr sz="1400" b="0">
                           <a:solidFill>
-                            <a:srgbClr val="2B2B2B"/>
+                            <a:srgbClr val="26231F"/>
                           </a:solidFill>
                         </a:rPr>
                         <a:t/>
@@ -4786,25 +4946,25 @@
                   <a:tcPr anchor="ctr" marL="73152" marR="73152">
                     <a:lnL w="9525" cap="flat" cmpd="sng" algn="ctr">
                       <a:solidFill>
-                        <a:srgbClr val="ECE3D4"/>
+                        <a:srgbClr val="F6E9D5"/>
                       </a:solidFill>
                       <a:prstDash val="solid"/>
                     </a:lnL>
                     <a:lnR w="9525" cap="flat" cmpd="sng" algn="ctr">
                       <a:solidFill>
-                        <a:srgbClr val="ECE3D4"/>
+                        <a:srgbClr val="F6E9D5"/>
                       </a:solidFill>
                       <a:prstDash val="solid"/>
                     </a:lnR>
                     <a:lnT w="9525" cap="flat" cmpd="sng" algn="ctr">
                       <a:solidFill>
-                        <a:srgbClr val="ECE3D4"/>
+                        <a:srgbClr val="F6E9D5"/>
                       </a:solidFill>
                       <a:prstDash val="solid"/>
                     </a:lnT>
                     <a:lnB w="9525" cap="flat" cmpd="sng" algn="ctr">
                       <a:solidFill>
-                        <a:srgbClr val="ECE3D4"/>
+                        <a:srgbClr val="F6E9D5"/>
                       </a:solidFill>
                       <a:prstDash val="solid"/>
                     </a:lnB>
@@ -4822,7 +4982,7 @@
                       <a:r>
                         <a:rPr sz="1400" b="0">
                           <a:solidFill>
-                            <a:srgbClr val="2B2B2B"/>
+                            <a:srgbClr val="26231F"/>
                           </a:solidFill>
                         </a:rPr>
                         <a:t/>
@@ -4832,25 +4992,25 @@
                   <a:tcPr anchor="ctr" marL="73152" marR="73152">
                     <a:lnL w="9525" cap="flat" cmpd="sng" algn="ctr">
                       <a:solidFill>
-                        <a:srgbClr val="ECE3D4"/>
+                        <a:srgbClr val="F6E9D5"/>
                       </a:solidFill>
                       <a:prstDash val="solid"/>
                     </a:lnL>
                     <a:lnR w="9525" cap="flat" cmpd="sng" algn="ctr">
                       <a:solidFill>
-                        <a:srgbClr val="ECE3D4"/>
+                        <a:srgbClr val="F6E9D5"/>
                       </a:solidFill>
                       <a:prstDash val="solid"/>
                     </a:lnR>
                     <a:lnT w="9525" cap="flat" cmpd="sng" algn="ctr">
                       <a:solidFill>
-                        <a:srgbClr val="ECE3D4"/>
+                        <a:srgbClr val="F6E9D5"/>
                       </a:solidFill>
                       <a:prstDash val="solid"/>
                     </a:lnT>
                     <a:lnB w="9525" cap="flat" cmpd="sng" algn="ctr">
                       <a:solidFill>
-                        <a:srgbClr val="ECE3D4"/>
+                        <a:srgbClr val="F6E9D5"/>
                       </a:solidFill>
                       <a:prstDash val="solid"/>
                     </a:lnB>
@@ -4868,7 +5028,7 @@
                       <a:r>
                         <a:rPr sz="1400" b="0">
                           <a:solidFill>
-                            <a:srgbClr val="2B2B2B"/>
+                            <a:srgbClr val="26231F"/>
                           </a:solidFill>
                         </a:rPr>
                         <a:t/>
@@ -4878,25 +5038,25 @@
                   <a:tcPr anchor="ctr" marL="73152" marR="73152">
                     <a:lnL w="9525" cap="flat" cmpd="sng" algn="ctr">
                       <a:solidFill>
-                        <a:srgbClr val="ECE3D4"/>
+                        <a:srgbClr val="F6E9D5"/>
                       </a:solidFill>
                       <a:prstDash val="solid"/>
                     </a:lnL>
                     <a:lnR w="9525" cap="flat" cmpd="sng" algn="ctr">
                       <a:solidFill>
-                        <a:srgbClr val="ECE3D4"/>
+                        <a:srgbClr val="F6E9D5"/>
                       </a:solidFill>
                       <a:prstDash val="solid"/>
                     </a:lnR>
                     <a:lnT w="9525" cap="flat" cmpd="sng" algn="ctr">
                       <a:solidFill>
-                        <a:srgbClr val="ECE3D4"/>
+                        <a:srgbClr val="F6E9D5"/>
                       </a:solidFill>
                       <a:prstDash val="solid"/>
                     </a:lnT>
                     <a:lnB w="9525" cap="flat" cmpd="sng" algn="ctr">
                       <a:solidFill>
-                        <a:srgbClr val="ECE3D4"/>
+                        <a:srgbClr val="F6E9D5"/>
                       </a:solidFill>
                       <a:prstDash val="solid"/>
                     </a:lnB>
@@ -4916,7 +5076,7 @@
                       <a:r>
                         <a:rPr sz="1400" b="0">
                           <a:solidFill>
-                            <a:srgbClr val="2B2B2B"/>
+                            <a:srgbClr val="26231F"/>
                           </a:solidFill>
                         </a:rPr>
                         <a:t/>
@@ -4926,30 +5086,30 @@
                   <a:tcPr anchor="ctr" marL="73152" marR="73152">
                     <a:lnL w="9525" cap="flat" cmpd="sng" algn="ctr">
                       <a:solidFill>
-                        <a:srgbClr val="ECE3D4"/>
+                        <a:srgbClr val="F6E9D5"/>
                       </a:solidFill>
                       <a:prstDash val="solid"/>
                     </a:lnL>
                     <a:lnR w="9525" cap="flat" cmpd="sng" algn="ctr">
                       <a:solidFill>
-                        <a:srgbClr val="ECE3D4"/>
+                        <a:srgbClr val="F6E9D5"/>
                       </a:solidFill>
                       <a:prstDash val="solid"/>
                     </a:lnR>
                     <a:lnT w="9525" cap="flat" cmpd="sng" algn="ctr">
                       <a:solidFill>
-                        <a:srgbClr val="ECE3D4"/>
+                        <a:srgbClr val="F6E9D5"/>
                       </a:solidFill>
                       <a:prstDash val="solid"/>
                     </a:lnT>
                     <a:lnB w="9525" cap="flat" cmpd="sng" algn="ctr">
                       <a:solidFill>
-                        <a:srgbClr val="ECE3D4"/>
+                        <a:srgbClr val="F6E9D5"/>
                       </a:solidFill>
                       <a:prstDash val="solid"/>
                     </a:lnB>
                     <a:solidFill>
-                      <a:srgbClr val="F8F5F1"/>
+                      <a:srgbClr val="FBF5EC"/>
                     </a:solidFill>
                   </a:tcPr>
                 </a:tc>
@@ -4962,7 +5122,7 @@
                       <a:r>
                         <a:rPr sz="1400" b="0">
                           <a:solidFill>
-                            <a:srgbClr val="2B2B2B"/>
+                            <a:srgbClr val="26231F"/>
                           </a:solidFill>
                         </a:rPr>
                         <a:t/>
@@ -4972,30 +5132,30 @@
                   <a:tcPr anchor="ctr" marL="73152" marR="73152">
                     <a:lnL w="9525" cap="flat" cmpd="sng" algn="ctr">
                       <a:solidFill>
-                        <a:srgbClr val="ECE3D4"/>
+                        <a:srgbClr val="F6E9D5"/>
                       </a:solidFill>
                       <a:prstDash val="solid"/>
                     </a:lnL>
                     <a:lnR w="9525" cap="flat" cmpd="sng" algn="ctr">
                       <a:solidFill>
-                        <a:srgbClr val="ECE3D4"/>
+                        <a:srgbClr val="F6E9D5"/>
                       </a:solidFill>
                       <a:prstDash val="solid"/>
                     </a:lnR>
                     <a:lnT w="9525" cap="flat" cmpd="sng" algn="ctr">
                       <a:solidFill>
-                        <a:srgbClr val="ECE3D4"/>
+                        <a:srgbClr val="F6E9D5"/>
                       </a:solidFill>
                       <a:prstDash val="solid"/>
                     </a:lnT>
                     <a:lnB w="9525" cap="flat" cmpd="sng" algn="ctr">
                       <a:solidFill>
-                        <a:srgbClr val="ECE3D4"/>
+                        <a:srgbClr val="F6E9D5"/>
                       </a:solidFill>
                       <a:prstDash val="solid"/>
                     </a:lnB>
                     <a:solidFill>
-                      <a:srgbClr val="F8F5F1"/>
+                      <a:srgbClr val="FBF5EC"/>
                     </a:solidFill>
                   </a:tcPr>
                 </a:tc>
@@ -5008,7 +5168,7 @@
                       <a:r>
                         <a:rPr sz="1400" b="0">
                           <a:solidFill>
-                            <a:srgbClr val="2B2B2B"/>
+                            <a:srgbClr val="26231F"/>
                           </a:solidFill>
                         </a:rPr>
                         <a:t/>
@@ -5018,30 +5178,30 @@
                   <a:tcPr anchor="ctr" marL="73152" marR="73152">
                     <a:lnL w="9525" cap="flat" cmpd="sng" algn="ctr">
                       <a:solidFill>
-                        <a:srgbClr val="ECE3D4"/>
+                        <a:srgbClr val="F6E9D5"/>
                       </a:solidFill>
                       <a:prstDash val="solid"/>
                     </a:lnL>
                     <a:lnR w="9525" cap="flat" cmpd="sng" algn="ctr">
                       <a:solidFill>
-                        <a:srgbClr val="ECE3D4"/>
+                        <a:srgbClr val="F6E9D5"/>
                       </a:solidFill>
                       <a:prstDash val="solid"/>
                     </a:lnR>
                     <a:lnT w="9525" cap="flat" cmpd="sng" algn="ctr">
                       <a:solidFill>
-                        <a:srgbClr val="ECE3D4"/>
+                        <a:srgbClr val="F6E9D5"/>
                       </a:solidFill>
                       <a:prstDash val="solid"/>
                     </a:lnT>
                     <a:lnB w="9525" cap="flat" cmpd="sng" algn="ctr">
                       <a:solidFill>
-                        <a:srgbClr val="ECE3D4"/>
+                        <a:srgbClr val="F6E9D5"/>
                       </a:solidFill>
                       <a:prstDash val="solid"/>
                     </a:lnB>
                     <a:solidFill>
-                      <a:srgbClr val="F8F5F1"/>
+                      <a:srgbClr val="FBF5EC"/>
                     </a:solidFill>
                   </a:tcPr>
                 </a:tc>
@@ -5054,7 +5214,7 @@
                       <a:r>
                         <a:rPr sz="1400" b="0">
                           <a:solidFill>
-                            <a:srgbClr val="2B2B2B"/>
+                            <a:srgbClr val="26231F"/>
                           </a:solidFill>
                         </a:rPr>
                         <a:t/>
@@ -5064,30 +5224,30 @@
                   <a:tcPr anchor="ctr" marL="73152" marR="73152">
                     <a:lnL w="9525" cap="flat" cmpd="sng" algn="ctr">
                       <a:solidFill>
-                        <a:srgbClr val="ECE3D4"/>
+                        <a:srgbClr val="F6E9D5"/>
                       </a:solidFill>
                       <a:prstDash val="solid"/>
                     </a:lnL>
                     <a:lnR w="9525" cap="flat" cmpd="sng" algn="ctr">
                       <a:solidFill>
-                        <a:srgbClr val="ECE3D4"/>
+                        <a:srgbClr val="F6E9D5"/>
                       </a:solidFill>
                       <a:prstDash val="solid"/>
                     </a:lnR>
                     <a:lnT w="9525" cap="flat" cmpd="sng" algn="ctr">
                       <a:solidFill>
-                        <a:srgbClr val="ECE3D4"/>
+                        <a:srgbClr val="F6E9D5"/>
                       </a:solidFill>
                       <a:prstDash val="solid"/>
                     </a:lnT>
                     <a:lnB w="9525" cap="flat" cmpd="sng" algn="ctr">
                       <a:solidFill>
-                        <a:srgbClr val="ECE3D4"/>
+                        <a:srgbClr val="F6E9D5"/>
                       </a:solidFill>
                       <a:prstDash val="solid"/>
                     </a:lnB>
                     <a:solidFill>
-                      <a:srgbClr val="F8F5F1"/>
+                      <a:srgbClr val="FBF5EC"/>
                     </a:solidFill>
                   </a:tcPr>
                 </a:tc>
@@ -5100,7 +5260,7 @@
                       <a:r>
                         <a:rPr sz="1400" b="0">
                           <a:solidFill>
-                            <a:srgbClr val="2B2B2B"/>
+                            <a:srgbClr val="26231F"/>
                           </a:solidFill>
                         </a:rPr>
                         <a:t/>
@@ -5110,30 +5270,30 @@
                   <a:tcPr anchor="ctr" marL="73152" marR="73152">
                     <a:lnL w="9525" cap="flat" cmpd="sng" algn="ctr">
                       <a:solidFill>
-                        <a:srgbClr val="ECE3D4"/>
+                        <a:srgbClr val="F6E9D5"/>
                       </a:solidFill>
                       <a:prstDash val="solid"/>
                     </a:lnL>
                     <a:lnR w="9525" cap="flat" cmpd="sng" algn="ctr">
                       <a:solidFill>
-                        <a:srgbClr val="ECE3D4"/>
+                        <a:srgbClr val="F6E9D5"/>
                       </a:solidFill>
                       <a:prstDash val="solid"/>
                     </a:lnR>
                     <a:lnT w="9525" cap="flat" cmpd="sng" algn="ctr">
                       <a:solidFill>
-                        <a:srgbClr val="ECE3D4"/>
+                        <a:srgbClr val="F6E9D5"/>
                       </a:solidFill>
                       <a:prstDash val="solid"/>
                     </a:lnT>
                     <a:lnB w="9525" cap="flat" cmpd="sng" algn="ctr">
                       <a:solidFill>
-                        <a:srgbClr val="ECE3D4"/>
+                        <a:srgbClr val="F6E9D5"/>
                       </a:solidFill>
                       <a:prstDash val="solid"/>
                     </a:lnB>
                     <a:solidFill>
-                      <a:srgbClr val="F8F5F1"/>
+                      <a:srgbClr val="FBF5EC"/>
                     </a:solidFill>
                   </a:tcPr>
                 </a:tc>
@@ -5148,7 +5308,7 @@
                       <a:r>
                         <a:rPr sz="1400" b="0">
                           <a:solidFill>
-                            <a:srgbClr val="2B2B2B"/>
+                            <a:srgbClr val="26231F"/>
                           </a:solidFill>
                         </a:rPr>
                         <a:t/>
@@ -5158,25 +5318,25 @@
                   <a:tcPr anchor="ctr" marL="73152" marR="73152">
                     <a:lnL w="9525" cap="flat" cmpd="sng" algn="ctr">
                       <a:solidFill>
-                        <a:srgbClr val="ECE3D4"/>
+                        <a:srgbClr val="F6E9D5"/>
                       </a:solidFill>
                       <a:prstDash val="solid"/>
                     </a:lnL>
                     <a:lnR w="9525" cap="flat" cmpd="sng" algn="ctr">
                       <a:solidFill>
-                        <a:srgbClr val="ECE3D4"/>
+                        <a:srgbClr val="F6E9D5"/>
                       </a:solidFill>
                       <a:prstDash val="solid"/>
                     </a:lnR>
                     <a:lnT w="9525" cap="flat" cmpd="sng" algn="ctr">
                       <a:solidFill>
-                        <a:srgbClr val="ECE3D4"/>
+                        <a:srgbClr val="F6E9D5"/>
                       </a:solidFill>
                       <a:prstDash val="solid"/>
                     </a:lnT>
                     <a:lnB w="9525" cap="flat" cmpd="sng" algn="ctr">
                       <a:solidFill>
-                        <a:srgbClr val="ECE3D4"/>
+                        <a:srgbClr val="F6E9D5"/>
                       </a:solidFill>
                       <a:prstDash val="solid"/>
                     </a:lnB>
@@ -5194,7 +5354,7 @@
                       <a:r>
                         <a:rPr sz="1400" b="0">
                           <a:solidFill>
-                            <a:srgbClr val="2B2B2B"/>
+                            <a:srgbClr val="26231F"/>
                           </a:solidFill>
                         </a:rPr>
                         <a:t/>
@@ -5204,25 +5364,25 @@
                   <a:tcPr anchor="ctr" marL="73152" marR="73152">
                     <a:lnL w="9525" cap="flat" cmpd="sng" algn="ctr">
                       <a:solidFill>
-                        <a:srgbClr val="ECE3D4"/>
+                        <a:srgbClr val="F6E9D5"/>
                       </a:solidFill>
                       <a:prstDash val="solid"/>
                     </a:lnL>
                     <a:lnR w="9525" cap="flat" cmpd="sng" algn="ctr">
                       <a:solidFill>
-                        <a:srgbClr val="ECE3D4"/>
+                        <a:srgbClr val="F6E9D5"/>
                       </a:solidFill>
                       <a:prstDash val="solid"/>
                     </a:lnR>
                     <a:lnT w="9525" cap="flat" cmpd="sng" algn="ctr">
                       <a:solidFill>
-                        <a:srgbClr val="ECE3D4"/>
+                        <a:srgbClr val="F6E9D5"/>
                       </a:solidFill>
                       <a:prstDash val="solid"/>
                     </a:lnT>
                     <a:lnB w="9525" cap="flat" cmpd="sng" algn="ctr">
                       <a:solidFill>
-                        <a:srgbClr val="ECE3D4"/>
+                        <a:srgbClr val="F6E9D5"/>
                       </a:solidFill>
                       <a:prstDash val="solid"/>
                     </a:lnB>
@@ -5240,7 +5400,7 @@
                       <a:r>
                         <a:rPr sz="1400" b="0">
                           <a:solidFill>
-                            <a:srgbClr val="2B2B2B"/>
+                            <a:srgbClr val="26231F"/>
                           </a:solidFill>
                         </a:rPr>
                         <a:t/>
@@ -5250,25 +5410,25 @@
                   <a:tcPr anchor="ctr" marL="73152" marR="73152">
                     <a:lnL w="9525" cap="flat" cmpd="sng" algn="ctr">
                       <a:solidFill>
-                        <a:srgbClr val="ECE3D4"/>
+                        <a:srgbClr val="F6E9D5"/>
                       </a:solidFill>
                       <a:prstDash val="solid"/>
                     </a:lnL>
                     <a:lnR w="9525" cap="flat" cmpd="sng" algn="ctr">
                       <a:solidFill>
-                        <a:srgbClr val="ECE3D4"/>
+                        <a:srgbClr val="F6E9D5"/>
                       </a:solidFill>
                       <a:prstDash val="solid"/>
                     </a:lnR>
                     <a:lnT w="9525" cap="flat" cmpd="sng" algn="ctr">
                       <a:solidFill>
-                        <a:srgbClr val="ECE3D4"/>
+                        <a:srgbClr val="F6E9D5"/>
                       </a:solidFill>
                       <a:prstDash val="solid"/>
                     </a:lnT>
                     <a:lnB w="9525" cap="flat" cmpd="sng" algn="ctr">
                       <a:solidFill>
-                        <a:srgbClr val="ECE3D4"/>
+                        <a:srgbClr val="F6E9D5"/>
                       </a:solidFill>
                       <a:prstDash val="solid"/>
                     </a:lnB>
@@ -5286,7 +5446,7 @@
                       <a:r>
                         <a:rPr sz="1400" b="0">
                           <a:solidFill>
-                            <a:srgbClr val="2B2B2B"/>
+                            <a:srgbClr val="26231F"/>
                           </a:solidFill>
                         </a:rPr>
                         <a:t/>
@@ -5296,25 +5456,25 @@
                   <a:tcPr anchor="ctr" marL="73152" marR="73152">
                     <a:lnL w="9525" cap="flat" cmpd="sng" algn="ctr">
                       <a:solidFill>
-                        <a:srgbClr val="ECE3D4"/>
+                        <a:srgbClr val="F6E9D5"/>
                       </a:solidFill>
                       <a:prstDash val="solid"/>
                     </a:lnL>
                     <a:lnR w="9525" cap="flat" cmpd="sng" algn="ctr">
                       <a:solidFill>
-                        <a:srgbClr val="ECE3D4"/>
+                        <a:srgbClr val="F6E9D5"/>
                       </a:solidFill>
                       <a:prstDash val="solid"/>
                     </a:lnR>
                     <a:lnT w="9525" cap="flat" cmpd="sng" algn="ctr">
                       <a:solidFill>
-                        <a:srgbClr val="ECE3D4"/>
+                        <a:srgbClr val="F6E9D5"/>
                       </a:solidFill>
                       <a:prstDash val="solid"/>
                     </a:lnT>
                     <a:lnB w="9525" cap="flat" cmpd="sng" algn="ctr">
                       <a:solidFill>
-                        <a:srgbClr val="ECE3D4"/>
+                        <a:srgbClr val="F6E9D5"/>
                       </a:solidFill>
                       <a:prstDash val="solid"/>
                     </a:lnB>
@@ -5332,7 +5492,7 @@
                       <a:r>
                         <a:rPr sz="1400" b="0">
                           <a:solidFill>
-                            <a:srgbClr val="2B2B2B"/>
+                            <a:srgbClr val="26231F"/>
                           </a:solidFill>
                         </a:rPr>
                         <a:t/>
@@ -5342,25 +5502,25 @@
                   <a:tcPr anchor="ctr" marL="73152" marR="73152">
                     <a:lnL w="9525" cap="flat" cmpd="sng" algn="ctr">
                       <a:solidFill>
-                        <a:srgbClr val="ECE3D4"/>
+                        <a:srgbClr val="F6E9D5"/>
                       </a:solidFill>
                       <a:prstDash val="solid"/>
                     </a:lnL>
                     <a:lnR w="9525" cap="flat" cmpd="sng" algn="ctr">
                       <a:solidFill>
-                        <a:srgbClr val="ECE3D4"/>
+                        <a:srgbClr val="F6E9D5"/>
                       </a:solidFill>
                       <a:prstDash val="solid"/>
                     </a:lnR>
                     <a:lnT w="9525" cap="flat" cmpd="sng" algn="ctr">
                       <a:solidFill>
-                        <a:srgbClr val="ECE3D4"/>
+                        <a:srgbClr val="F6E9D5"/>
                       </a:solidFill>
                       <a:prstDash val="solid"/>
                     </a:lnT>
                     <a:lnB w="9525" cap="flat" cmpd="sng" algn="ctr">
                       <a:solidFill>
-                        <a:srgbClr val="ECE3D4"/>
+                        <a:srgbClr val="F6E9D5"/>
                       </a:solidFill>
                       <a:prstDash val="solid"/>
                     </a:lnB>
@@ -5380,7 +5540,7 @@
                       <a:r>
                         <a:rPr sz="1400" b="0">
                           <a:solidFill>
-                            <a:srgbClr val="2B2B2B"/>
+                            <a:srgbClr val="26231F"/>
                           </a:solidFill>
                         </a:rPr>
                         <a:t/>
@@ -5390,30 +5550,30 @@
                   <a:tcPr anchor="ctr" marL="73152" marR="73152">
                     <a:lnL w="9525" cap="flat" cmpd="sng" algn="ctr">
                       <a:solidFill>
-                        <a:srgbClr val="ECE3D4"/>
+                        <a:srgbClr val="F6E9D5"/>
                       </a:solidFill>
                       <a:prstDash val="solid"/>
                     </a:lnL>
                     <a:lnR w="9525" cap="flat" cmpd="sng" algn="ctr">
                       <a:solidFill>
-                        <a:srgbClr val="ECE3D4"/>
+                        <a:srgbClr val="F6E9D5"/>
                       </a:solidFill>
                       <a:prstDash val="solid"/>
                     </a:lnR>
                     <a:lnT w="9525" cap="flat" cmpd="sng" algn="ctr">
                       <a:solidFill>
-                        <a:srgbClr val="ECE3D4"/>
+                        <a:srgbClr val="F6E9D5"/>
                       </a:solidFill>
                       <a:prstDash val="solid"/>
                     </a:lnT>
                     <a:lnB w="9525" cap="flat" cmpd="sng" algn="ctr">
                       <a:solidFill>
-                        <a:srgbClr val="ECE3D4"/>
+                        <a:srgbClr val="F6E9D5"/>
                       </a:solidFill>
                       <a:prstDash val="solid"/>
                     </a:lnB>
                     <a:solidFill>
-                      <a:srgbClr val="F8F5F1"/>
+                      <a:srgbClr val="FBF5EC"/>
                     </a:solidFill>
                   </a:tcPr>
                 </a:tc>
@@ -5426,7 +5586,7 @@
                       <a:r>
                         <a:rPr sz="1400" b="0">
                           <a:solidFill>
-                            <a:srgbClr val="2B2B2B"/>
+                            <a:srgbClr val="26231F"/>
                           </a:solidFill>
                         </a:rPr>
                         <a:t/>
@@ -5436,30 +5596,30 @@
                   <a:tcPr anchor="ctr" marL="73152" marR="73152">
                     <a:lnL w="9525" cap="flat" cmpd="sng" algn="ctr">
                       <a:solidFill>
-                        <a:srgbClr val="ECE3D4"/>
+                        <a:srgbClr val="F6E9D5"/>
                       </a:solidFill>
                       <a:prstDash val="solid"/>
                     </a:lnL>
                     <a:lnR w="9525" cap="flat" cmpd="sng" algn="ctr">
                       <a:solidFill>
-                        <a:srgbClr val="ECE3D4"/>
+                        <a:srgbClr val="F6E9D5"/>
                       </a:solidFill>
                       <a:prstDash val="solid"/>
                     </a:lnR>
                     <a:lnT w="9525" cap="flat" cmpd="sng" algn="ctr">
                       <a:solidFill>
-                        <a:srgbClr val="ECE3D4"/>
+                        <a:srgbClr val="F6E9D5"/>
                       </a:solidFill>
                       <a:prstDash val="solid"/>
                     </a:lnT>
                     <a:lnB w="9525" cap="flat" cmpd="sng" algn="ctr">
                       <a:solidFill>
-                        <a:srgbClr val="ECE3D4"/>
+                        <a:srgbClr val="F6E9D5"/>
                       </a:solidFill>
                       <a:prstDash val="solid"/>
                     </a:lnB>
                     <a:solidFill>
-                      <a:srgbClr val="F8F5F1"/>
+                      <a:srgbClr val="FBF5EC"/>
                     </a:solidFill>
                   </a:tcPr>
                 </a:tc>
@@ -5472,7 +5632,7 @@
                       <a:r>
                         <a:rPr sz="1400" b="0">
                           <a:solidFill>
-                            <a:srgbClr val="2B2B2B"/>
+                            <a:srgbClr val="26231F"/>
                           </a:solidFill>
                         </a:rPr>
                         <a:t/>
@@ -5482,30 +5642,30 @@
                   <a:tcPr anchor="ctr" marL="73152" marR="73152">
                     <a:lnL w="9525" cap="flat" cmpd="sng" algn="ctr">
                       <a:solidFill>
-                        <a:srgbClr val="ECE3D4"/>
+                        <a:srgbClr val="F6E9D5"/>
                       </a:solidFill>
                       <a:prstDash val="solid"/>
                     </a:lnL>
                     <a:lnR w="9525" cap="flat" cmpd="sng" algn="ctr">
                       <a:solidFill>
-                        <a:srgbClr val="ECE3D4"/>
+                        <a:srgbClr val="F6E9D5"/>
                       </a:solidFill>
                       <a:prstDash val="solid"/>
                     </a:lnR>
                     <a:lnT w="9525" cap="flat" cmpd="sng" algn="ctr">
                       <a:solidFill>
-                        <a:srgbClr val="ECE3D4"/>
+                        <a:srgbClr val="F6E9D5"/>
                       </a:solidFill>
                       <a:prstDash val="solid"/>
                     </a:lnT>
                     <a:lnB w="9525" cap="flat" cmpd="sng" algn="ctr">
                       <a:solidFill>
-                        <a:srgbClr val="ECE3D4"/>
+                        <a:srgbClr val="F6E9D5"/>
                       </a:solidFill>
                       <a:prstDash val="solid"/>
                     </a:lnB>
                     <a:solidFill>
-                      <a:srgbClr val="F8F5F1"/>
+                      <a:srgbClr val="FBF5EC"/>
                     </a:solidFill>
                   </a:tcPr>
                 </a:tc>
@@ -5518,7 +5678,7 @@
                       <a:r>
                         <a:rPr sz="1400" b="0">
                           <a:solidFill>
-                            <a:srgbClr val="2B2B2B"/>
+                            <a:srgbClr val="26231F"/>
                           </a:solidFill>
                         </a:rPr>
                         <a:t/>
@@ -5528,30 +5688,30 @@
                   <a:tcPr anchor="ctr" marL="73152" marR="73152">
                     <a:lnL w="9525" cap="flat" cmpd="sng" algn="ctr">
                       <a:solidFill>
-                        <a:srgbClr val="ECE3D4"/>
+                        <a:srgbClr val="F6E9D5"/>
                       </a:solidFill>
                       <a:prstDash val="solid"/>
                     </a:lnL>
                     <a:lnR w="9525" cap="flat" cmpd="sng" algn="ctr">
                       <a:solidFill>
-                        <a:srgbClr val="ECE3D4"/>
+                        <a:srgbClr val="F6E9D5"/>
                       </a:solidFill>
                       <a:prstDash val="solid"/>
                     </a:lnR>
                     <a:lnT w="9525" cap="flat" cmpd="sng" algn="ctr">
                       <a:solidFill>
-                        <a:srgbClr val="ECE3D4"/>
+                        <a:srgbClr val="F6E9D5"/>
                       </a:solidFill>
                       <a:prstDash val="solid"/>
                     </a:lnT>
                     <a:lnB w="9525" cap="flat" cmpd="sng" algn="ctr">
                       <a:solidFill>
-                        <a:srgbClr val="ECE3D4"/>
+                        <a:srgbClr val="F6E9D5"/>
                       </a:solidFill>
                       <a:prstDash val="solid"/>
                     </a:lnB>
                     <a:solidFill>
-                      <a:srgbClr val="F8F5F1"/>
+                      <a:srgbClr val="FBF5EC"/>
                     </a:solidFill>
                   </a:tcPr>
                 </a:tc>
@@ -5564,7 +5724,7 @@
                       <a:r>
                         <a:rPr sz="1400" b="0">
                           <a:solidFill>
-                            <a:srgbClr val="2B2B2B"/>
+                            <a:srgbClr val="26231F"/>
                           </a:solidFill>
                         </a:rPr>
                         <a:t/>
@@ -5574,30 +5734,30 @@
                   <a:tcPr anchor="ctr" marL="73152" marR="73152">
                     <a:lnL w="9525" cap="flat" cmpd="sng" algn="ctr">
                       <a:solidFill>
-                        <a:srgbClr val="ECE3D4"/>
+                        <a:srgbClr val="F6E9D5"/>
                       </a:solidFill>
                       <a:prstDash val="solid"/>
                     </a:lnL>
                     <a:lnR w="9525" cap="flat" cmpd="sng" algn="ctr">
                       <a:solidFill>
-                        <a:srgbClr val="ECE3D4"/>
+                        <a:srgbClr val="F6E9D5"/>
                       </a:solidFill>
                       <a:prstDash val="solid"/>
                     </a:lnR>
                     <a:lnT w="9525" cap="flat" cmpd="sng" algn="ctr">
                       <a:solidFill>
-                        <a:srgbClr val="ECE3D4"/>
+                        <a:srgbClr val="F6E9D5"/>
                       </a:solidFill>
                       <a:prstDash val="solid"/>
                     </a:lnT>
                     <a:lnB w="9525" cap="flat" cmpd="sng" algn="ctr">
                       <a:solidFill>
-                        <a:srgbClr val="ECE3D4"/>
+                        <a:srgbClr val="F6E9D5"/>
                       </a:solidFill>
                       <a:prstDash val="solid"/>
                     </a:lnB>
                     <a:solidFill>
-                      <a:srgbClr val="F8F5F1"/>
+                      <a:srgbClr val="FBF5EC"/>
                     </a:solidFill>
                   </a:tcPr>
                 </a:tc>
@@ -5612,7 +5772,7 @@
                       <a:r>
                         <a:rPr sz="1400" b="0">
                           <a:solidFill>
-                            <a:srgbClr val="2B2B2B"/>
+                            <a:srgbClr val="26231F"/>
                           </a:solidFill>
                         </a:rPr>
                         <a:t/>
@@ -5622,25 +5782,25 @@
                   <a:tcPr anchor="ctr" marL="73152" marR="73152">
                     <a:lnL w="9525" cap="flat" cmpd="sng" algn="ctr">
                       <a:solidFill>
-                        <a:srgbClr val="ECE3D4"/>
+                        <a:srgbClr val="F6E9D5"/>
                       </a:solidFill>
                       <a:prstDash val="solid"/>
                     </a:lnL>
                     <a:lnR w="9525" cap="flat" cmpd="sng" algn="ctr">
                       <a:solidFill>
-                        <a:srgbClr val="ECE3D4"/>
+                        <a:srgbClr val="F6E9D5"/>
                       </a:solidFill>
                       <a:prstDash val="solid"/>
                     </a:lnR>
                     <a:lnT w="9525" cap="flat" cmpd="sng" algn="ctr">
                       <a:solidFill>
-                        <a:srgbClr val="ECE3D4"/>
+                        <a:srgbClr val="F6E9D5"/>
                       </a:solidFill>
                       <a:prstDash val="solid"/>
                     </a:lnT>
                     <a:lnB w="9525" cap="flat" cmpd="sng" algn="ctr">
                       <a:solidFill>
-                        <a:srgbClr val="ECE3D4"/>
+                        <a:srgbClr val="F6E9D5"/>
                       </a:solidFill>
                       <a:prstDash val="solid"/>
                     </a:lnB>
@@ -5658,7 +5818,7 @@
                       <a:r>
                         <a:rPr sz="1400" b="0">
                           <a:solidFill>
-                            <a:srgbClr val="2B2B2B"/>
+                            <a:srgbClr val="26231F"/>
                           </a:solidFill>
                         </a:rPr>
                         <a:t/>
@@ -5668,25 +5828,25 @@
                   <a:tcPr anchor="ctr" marL="73152" marR="73152">
                     <a:lnL w="9525" cap="flat" cmpd="sng" algn="ctr">
                       <a:solidFill>
-                        <a:srgbClr val="ECE3D4"/>
+                        <a:srgbClr val="F6E9D5"/>
                       </a:solidFill>
                       <a:prstDash val="solid"/>
                     </a:lnL>
                     <a:lnR w="9525" cap="flat" cmpd="sng" algn="ctr">
                       <a:solidFill>
-                        <a:srgbClr val="ECE3D4"/>
+                        <a:srgbClr val="F6E9D5"/>
                       </a:solidFill>
                       <a:prstDash val="solid"/>
                     </a:lnR>
                     <a:lnT w="9525" cap="flat" cmpd="sng" algn="ctr">
                       <a:solidFill>
-                        <a:srgbClr val="ECE3D4"/>
+                        <a:srgbClr val="F6E9D5"/>
                       </a:solidFill>
                       <a:prstDash val="solid"/>
                     </a:lnT>
                     <a:lnB w="9525" cap="flat" cmpd="sng" algn="ctr">
                       <a:solidFill>
-                        <a:srgbClr val="ECE3D4"/>
+                        <a:srgbClr val="F6E9D5"/>
                       </a:solidFill>
                       <a:prstDash val="solid"/>
                     </a:lnB>
@@ -5704,7 +5864,7 @@
                       <a:r>
                         <a:rPr sz="1400" b="0">
                           <a:solidFill>
-                            <a:srgbClr val="2B2B2B"/>
+                            <a:srgbClr val="26231F"/>
                           </a:solidFill>
                         </a:rPr>
                         <a:t/>
@@ -5714,25 +5874,25 @@
                   <a:tcPr anchor="ctr" marL="73152" marR="73152">
                     <a:lnL w="9525" cap="flat" cmpd="sng" algn="ctr">
                       <a:solidFill>
-                        <a:srgbClr val="ECE3D4"/>
+                        <a:srgbClr val="F6E9D5"/>
                       </a:solidFill>
                       <a:prstDash val="solid"/>
                     </a:lnL>
                     <a:lnR w="9525" cap="flat" cmpd="sng" algn="ctr">
                       <a:solidFill>
-                        <a:srgbClr val="ECE3D4"/>
+                        <a:srgbClr val="F6E9D5"/>
                       </a:solidFill>
                       <a:prstDash val="solid"/>
                     </a:lnR>
                     <a:lnT w="9525" cap="flat" cmpd="sng" algn="ctr">
                       <a:solidFill>
-                        <a:srgbClr val="ECE3D4"/>
+                        <a:srgbClr val="F6E9D5"/>
                       </a:solidFill>
                       <a:prstDash val="solid"/>
                     </a:lnT>
                     <a:lnB w="9525" cap="flat" cmpd="sng" algn="ctr">
                       <a:solidFill>
-                        <a:srgbClr val="ECE3D4"/>
+                        <a:srgbClr val="F6E9D5"/>
                       </a:solidFill>
                       <a:prstDash val="solid"/>
                     </a:lnB>
@@ -5750,7 +5910,7 @@
                       <a:r>
                         <a:rPr sz="1400" b="0">
                           <a:solidFill>
-                            <a:srgbClr val="2B2B2B"/>
+                            <a:srgbClr val="26231F"/>
                           </a:solidFill>
                         </a:rPr>
                         <a:t/>
@@ -5760,25 +5920,25 @@
                   <a:tcPr anchor="ctr" marL="73152" marR="73152">
                     <a:lnL w="9525" cap="flat" cmpd="sng" algn="ctr">
                       <a:solidFill>
-                        <a:srgbClr val="ECE3D4"/>
+                        <a:srgbClr val="F6E9D5"/>
                       </a:solidFill>
                       <a:prstDash val="solid"/>
                     </a:lnL>
                     <a:lnR w="9525" cap="flat" cmpd="sng" algn="ctr">
                       <a:solidFill>
-                        <a:srgbClr val="ECE3D4"/>
+                        <a:srgbClr val="F6E9D5"/>
                       </a:solidFill>
                       <a:prstDash val="solid"/>
                     </a:lnR>
                     <a:lnT w="9525" cap="flat" cmpd="sng" algn="ctr">
                       <a:solidFill>
-                        <a:srgbClr val="ECE3D4"/>
+                        <a:srgbClr val="F6E9D5"/>
                       </a:solidFill>
                       <a:prstDash val="solid"/>
                     </a:lnT>
                     <a:lnB w="9525" cap="flat" cmpd="sng" algn="ctr">
                       <a:solidFill>
-                        <a:srgbClr val="ECE3D4"/>
+                        <a:srgbClr val="F6E9D5"/>
                       </a:solidFill>
                       <a:prstDash val="solid"/>
                     </a:lnB>
@@ -5796,7 +5956,7 @@
                       <a:r>
                         <a:rPr sz="1400" b="0">
                           <a:solidFill>
-                            <a:srgbClr val="2B2B2B"/>
+                            <a:srgbClr val="26231F"/>
                           </a:solidFill>
                         </a:rPr>
                         <a:t/>
@@ -5806,25 +5966,25 @@
                   <a:tcPr anchor="ctr" marL="73152" marR="73152">
                     <a:lnL w="9525" cap="flat" cmpd="sng" algn="ctr">
                       <a:solidFill>
-                        <a:srgbClr val="ECE3D4"/>
+                        <a:srgbClr val="F6E9D5"/>
                       </a:solidFill>
                       <a:prstDash val="solid"/>
                     </a:lnL>
                     <a:lnR w="9525" cap="flat" cmpd="sng" algn="ctr">
                       <a:solidFill>
-                        <a:srgbClr val="ECE3D4"/>
+                        <a:srgbClr val="F6E9D5"/>
                       </a:solidFill>
                       <a:prstDash val="solid"/>
                     </a:lnR>
                     <a:lnT w="9525" cap="flat" cmpd="sng" algn="ctr">
                       <a:solidFill>
-                        <a:srgbClr val="ECE3D4"/>
+                        <a:srgbClr val="F6E9D5"/>
                       </a:solidFill>
                       <a:prstDash val="solid"/>
                     </a:lnT>
                     <a:lnB w="9525" cap="flat" cmpd="sng" algn="ctr">
                       <a:solidFill>
-                        <a:srgbClr val="ECE3D4"/>
+                        <a:srgbClr val="F6E9D5"/>
                       </a:solidFill>
                       <a:prstDash val="solid"/>
                     </a:lnB>
@@ -5844,7 +6004,7 @@
                       <a:r>
                         <a:rPr sz="1400" b="0">
                           <a:solidFill>
-                            <a:srgbClr val="2B2B2B"/>
+                            <a:srgbClr val="26231F"/>
                           </a:solidFill>
                         </a:rPr>
                         <a:t/>
@@ -5854,30 +6014,30 @@
                   <a:tcPr anchor="ctr" marL="73152" marR="73152">
                     <a:lnL w="9525" cap="flat" cmpd="sng" algn="ctr">
                       <a:solidFill>
-                        <a:srgbClr val="ECE3D4"/>
+                        <a:srgbClr val="F6E9D5"/>
                       </a:solidFill>
                       <a:prstDash val="solid"/>
                     </a:lnL>
                     <a:lnR w="9525" cap="flat" cmpd="sng" algn="ctr">
                       <a:solidFill>
-                        <a:srgbClr val="ECE3D4"/>
+                        <a:srgbClr val="F6E9D5"/>
                       </a:solidFill>
                       <a:prstDash val="solid"/>
                     </a:lnR>
                     <a:lnT w="9525" cap="flat" cmpd="sng" algn="ctr">
                       <a:solidFill>
-                        <a:srgbClr val="ECE3D4"/>
+                        <a:srgbClr val="F6E9D5"/>
                       </a:solidFill>
                       <a:prstDash val="solid"/>
                     </a:lnT>
                     <a:lnB w="9525" cap="flat" cmpd="sng" algn="ctr">
                       <a:solidFill>
-                        <a:srgbClr val="ECE3D4"/>
+                        <a:srgbClr val="F6E9D5"/>
                       </a:solidFill>
                       <a:prstDash val="solid"/>
                     </a:lnB>
                     <a:solidFill>
-                      <a:srgbClr val="F8F5F1"/>
+                      <a:srgbClr val="FBF5EC"/>
                     </a:solidFill>
                   </a:tcPr>
                 </a:tc>
@@ -5890,7 +6050,7 @@
                       <a:r>
                         <a:rPr sz="1400" b="0">
                           <a:solidFill>
-                            <a:srgbClr val="2B2B2B"/>
+                            <a:srgbClr val="26231F"/>
                           </a:solidFill>
                         </a:rPr>
                         <a:t/>
@@ -5900,30 +6060,30 @@
                   <a:tcPr anchor="ctr" marL="73152" marR="73152">
                     <a:lnL w="9525" cap="flat" cmpd="sng" algn="ctr">
                       <a:solidFill>
-                        <a:srgbClr val="ECE3D4"/>
+                        <a:srgbClr val="F6E9D5"/>
                       </a:solidFill>
                       <a:prstDash val="solid"/>
                     </a:lnL>
                     <a:lnR w="9525" cap="flat" cmpd="sng" algn="ctr">
                       <a:solidFill>
-                        <a:srgbClr val="ECE3D4"/>
+                        <a:srgbClr val="F6E9D5"/>
                       </a:solidFill>
                       <a:prstDash val="solid"/>
                     </a:lnR>
                     <a:lnT w="9525" cap="flat" cmpd="sng" algn="ctr">
                       <a:solidFill>
-                        <a:srgbClr val="ECE3D4"/>
+                        <a:srgbClr val="F6E9D5"/>
                       </a:solidFill>
                       <a:prstDash val="solid"/>
                     </a:lnT>
                     <a:lnB w="9525" cap="flat" cmpd="sng" algn="ctr">
                       <a:solidFill>
-                        <a:srgbClr val="ECE3D4"/>
+                        <a:srgbClr val="F6E9D5"/>
                       </a:solidFill>
                       <a:prstDash val="solid"/>
                     </a:lnB>
                     <a:solidFill>
-                      <a:srgbClr val="F8F5F1"/>
+                      <a:srgbClr val="FBF5EC"/>
                     </a:solidFill>
                   </a:tcPr>
                 </a:tc>
@@ -5936,7 +6096,7 @@
                       <a:r>
                         <a:rPr sz="1400" b="0">
                           <a:solidFill>
-                            <a:srgbClr val="2B2B2B"/>
+                            <a:srgbClr val="26231F"/>
                           </a:solidFill>
                         </a:rPr>
                         <a:t/>
@@ -5946,30 +6106,30 @@
                   <a:tcPr anchor="ctr" marL="73152" marR="73152">
                     <a:lnL w="9525" cap="flat" cmpd="sng" algn="ctr">
                       <a:solidFill>
-                        <a:srgbClr val="ECE3D4"/>
+                        <a:srgbClr val="F6E9D5"/>
                       </a:solidFill>
                       <a:prstDash val="solid"/>
                     </a:lnL>
                     <a:lnR w="9525" cap="flat" cmpd="sng" algn="ctr">
                       <a:solidFill>
-                        <a:srgbClr val="ECE3D4"/>
+                        <a:srgbClr val="F6E9D5"/>
                       </a:solidFill>
                       <a:prstDash val="solid"/>
                     </a:lnR>
                     <a:lnT w="9525" cap="flat" cmpd="sng" algn="ctr">
                       <a:solidFill>
-                        <a:srgbClr val="ECE3D4"/>
+                        <a:srgbClr val="F6E9D5"/>
                       </a:solidFill>
                       <a:prstDash val="solid"/>
                     </a:lnT>
                     <a:lnB w="9525" cap="flat" cmpd="sng" algn="ctr">
                       <a:solidFill>
-                        <a:srgbClr val="ECE3D4"/>
+                        <a:srgbClr val="F6E9D5"/>
                       </a:solidFill>
                       <a:prstDash val="solid"/>
                     </a:lnB>
                     <a:solidFill>
-                      <a:srgbClr val="F8F5F1"/>
+                      <a:srgbClr val="FBF5EC"/>
                     </a:solidFill>
                   </a:tcPr>
                 </a:tc>
@@ -5982,7 +6142,7 @@
                       <a:r>
                         <a:rPr sz="1400" b="0">
                           <a:solidFill>
-                            <a:srgbClr val="2B2B2B"/>
+                            <a:srgbClr val="26231F"/>
                           </a:solidFill>
                         </a:rPr>
                         <a:t/>
@@ -5992,30 +6152,30 @@
                   <a:tcPr anchor="ctr" marL="73152" marR="73152">
                     <a:lnL w="9525" cap="flat" cmpd="sng" algn="ctr">
                       <a:solidFill>
-                        <a:srgbClr val="ECE3D4"/>
+                        <a:srgbClr val="F6E9D5"/>
                       </a:solidFill>
                       <a:prstDash val="solid"/>
                     </a:lnL>
                     <a:lnR w="9525" cap="flat" cmpd="sng" algn="ctr">
                       <a:solidFill>
-                        <a:srgbClr val="ECE3D4"/>
+                        <a:srgbClr val="F6E9D5"/>
                       </a:solidFill>
                       <a:prstDash val="solid"/>
                     </a:lnR>
                     <a:lnT w="9525" cap="flat" cmpd="sng" algn="ctr">
                       <a:solidFill>
-                        <a:srgbClr val="ECE3D4"/>
+                        <a:srgbClr val="F6E9D5"/>
                       </a:solidFill>
                       <a:prstDash val="solid"/>
                     </a:lnT>
                     <a:lnB w="9525" cap="flat" cmpd="sng" algn="ctr">
                       <a:solidFill>
-                        <a:srgbClr val="ECE3D4"/>
+                        <a:srgbClr val="F6E9D5"/>
                       </a:solidFill>
                       <a:prstDash val="solid"/>
                     </a:lnB>
                     <a:solidFill>
-                      <a:srgbClr val="F8F5F1"/>
+                      <a:srgbClr val="FBF5EC"/>
                     </a:solidFill>
                   </a:tcPr>
                 </a:tc>
@@ -6028,7 +6188,7 @@
                       <a:r>
                         <a:rPr sz="1400" b="0">
                           <a:solidFill>
-                            <a:srgbClr val="2B2B2B"/>
+                            <a:srgbClr val="26231F"/>
                           </a:solidFill>
                         </a:rPr>
                         <a:t/>
@@ -6038,30 +6198,30 @@
                   <a:tcPr anchor="ctr" marL="73152" marR="73152">
                     <a:lnL w="9525" cap="flat" cmpd="sng" algn="ctr">
                       <a:solidFill>
-                        <a:srgbClr val="ECE3D4"/>
+                        <a:srgbClr val="F6E9D5"/>
                       </a:solidFill>
                       <a:prstDash val="solid"/>
                     </a:lnL>
                     <a:lnR w="9525" cap="flat" cmpd="sng" algn="ctr">
                       <a:solidFill>
-                        <a:srgbClr val="ECE3D4"/>
+                        <a:srgbClr val="F6E9D5"/>
                       </a:solidFill>
                       <a:prstDash val="solid"/>
                     </a:lnR>
                     <a:lnT w="9525" cap="flat" cmpd="sng" algn="ctr">
                       <a:solidFill>
-                        <a:srgbClr val="ECE3D4"/>
+                        <a:srgbClr val="F6E9D5"/>
                       </a:solidFill>
                       <a:prstDash val="solid"/>
                     </a:lnT>
                     <a:lnB w="9525" cap="flat" cmpd="sng" algn="ctr">
                       <a:solidFill>
-                        <a:srgbClr val="ECE3D4"/>
+                        <a:srgbClr val="F6E9D5"/>
                       </a:solidFill>
                       <a:prstDash val="solid"/>
                     </a:lnB>
                     <a:solidFill>
-                      <a:srgbClr val="F8F5F1"/>
+                      <a:srgbClr val="FBF5EC"/>
                     </a:solidFill>
                   </a:tcPr>
                 </a:tc>
@@ -6084,7 +6244,7 @@
     <p:bg>
       <p:bgPr>
         <a:solidFill>
-          <a:srgbClr val="FFFFFF"/>
+          <a:srgbClr val="F6E9D5"/>
         </a:solidFill>
         <a:effectLst/>
       </p:bgPr>
@@ -6104,14 +6264,16 @@
         </p:nvSpPr>
         <p:spPr>
           <a:xfrm>
-            <a:off x="-182880" y="6144768"/>
-            <a:ext cx="12557455" cy="731520"/>
-          </a:xfrm>
-          <a:prstGeom prst="wave">
-            <a:avLst/>
+            <a:off x="640080" y="566928"/>
+            <a:ext cx="64008" cy="868680"/>
+          </a:xfrm>
+          <a:prstGeom prst="roundRect">
+            <a:avLst>
+              <a:gd name="adj" fmla="val 50000"/>
+            </a:avLst>
           </a:prstGeom>
           <a:solidFill>
-            <a:srgbClr val="ECE3D4"/>
+            <a:srgbClr val="D8B279"/>
           </a:solidFill>
           <a:ln>
             <a:noFill/>
@@ -6127,20 +6289,58 @@
       </p:sp>
       <p:sp>
         <p:nvSpPr>
-          <p:cNvPr id="4" name="장식"/>
+          <p:cNvPr id="4" name="상단 라벨"/>
+          <p:cNvSpPr txBox="1"/>
+          <p:nvPr/>
+        </p:nvSpPr>
+        <p:spPr>
+          <a:xfrm>
+            <a:off x="868680" y="274320"/>
+            <a:ext cx="5486400" cy="274320"/>
+          </a:xfrm>
+          <a:prstGeom prst="rect">
+            <a:avLst/>
+          </a:prstGeom>
+          <a:noFill/>
+        </p:spPr>
+        <p:txBody>
+          <a:bodyPr wrap="square" lIns="54864" rIns="54864" tIns="27432" bIns="27432" anchor="ctr">
+            <a:noAutofit/>
+          </a:bodyPr>
+          <a:lstStyle/>
+          <a:p>
+            <a:pPr algn="l">
+              <a:lnSpc>
+                <a:spcPct val="115000"/>
+              </a:lnSpc>
+            </a:pPr>
+            <a:r>
+              <a:rPr sz="900" b="1" i="0" spc="250">
+                <a:solidFill>
+                  <a:srgbClr val="8E8780"/>
+                </a:solidFill>
+              </a:rPr>
+              <a:t>INSURANCE CHECK</a:t>
+            </a:r>
+          </a:p>
+        </p:txBody>
+      </p:sp>
+      <p:sp>
+        <p:nvSpPr>
+          <p:cNvPr id="5" name="포인트"/>
           <p:cNvSpPr/>
           <p:nvPr/>
         </p:nvSpPr>
         <p:spPr>
           <a:xfrm>
-            <a:off x="-182880" y="6400800"/>
-            <a:ext cx="12557455" cy="502920"/>
-          </a:xfrm>
-          <a:prstGeom prst="wave">
+            <a:off x="11167567" y="667512"/>
+            <a:ext cx="310896" cy="310896"/>
+          </a:xfrm>
+          <a:prstGeom prst="ellipse">
             <a:avLst/>
           </a:prstGeom>
           <a:solidFill>
-            <a:srgbClr val="9D7D4D"/>
+            <a:srgbClr val="EBD2AD"/>
           </a:solidFill>
           <a:ln>
             <a:noFill/>
@@ -6166,8 +6366,8 @@
         </p:nvSpPr>
         <p:spPr>
           <a:xfrm>
-            <a:off x="640080" y="457200"/>
-            <a:ext cx="9722815" cy="868680"/>
+            <a:off x="868680" y="566928"/>
+            <a:ext cx="9448495" cy="868680"/>
           </a:xfrm>
         </p:spPr>
         <p:txBody>
@@ -6184,7 +6384,7 @@
             <a:r>
               <a:rPr sz="3000" b="1" i="0">
                 <a:solidFill>
-                  <a:srgbClr val="59472C"/>
+                  <a:srgbClr val="26231F"/>
                 </a:solidFill>
               </a:rPr>
               <a:t>보장 항목 체크</a:t>
@@ -6194,14 +6394,14 @@
       </p:sp>
       <p:graphicFrame>
         <p:nvGraphicFramePr>
-          <p:cNvPr id="5" name="표"/>
+          <p:cNvPr id="6" name="표"/>
           <p:cNvGraphicFramePr>
             <a:graphicFrameLocks noGrp="1"/>
           </p:cNvGraphicFramePr>
           <p:nvPr/>
         </p:nvGraphicFramePr>
         <p:xfrm>
-          <a:off x="640080" y="1554480"/>
+          <a:off x="640080" y="1783080"/>
           <a:ext cx="10911534" cy="4773168"/>
         </p:xfrm>
         <a:graphic>
@@ -6226,7 +6426,7 @@
                       <a:r>
                         <a:rPr sz="1400" b="1">
                           <a:solidFill>
-                            <a:srgbClr val="FFFFFF"/>
+                            <a:srgbClr val="26231F"/>
                           </a:solidFill>
                         </a:rPr>
                         <a:t>보장 항목</a:t>
@@ -6236,30 +6436,30 @@
                   <a:tcPr anchor="ctr" marL="73152" marR="73152">
                     <a:lnL w="9525" cap="flat" cmpd="sng" algn="ctr">
                       <a:solidFill>
-                        <a:srgbClr val="9D7D4D"/>
+                        <a:srgbClr val="D8B279"/>
                       </a:solidFill>
                       <a:prstDash val="solid"/>
                     </a:lnL>
                     <a:lnR w="9525" cap="flat" cmpd="sng" algn="ctr">
                       <a:solidFill>
-                        <a:srgbClr val="9D7D4D"/>
+                        <a:srgbClr val="D8B279"/>
                       </a:solidFill>
                       <a:prstDash val="solid"/>
                     </a:lnR>
                     <a:lnT w="9525" cap="flat" cmpd="sng" algn="ctr">
                       <a:solidFill>
-                        <a:srgbClr val="9D7D4D"/>
+                        <a:srgbClr val="D8B279"/>
                       </a:solidFill>
                       <a:prstDash val="solid"/>
                     </a:lnT>
                     <a:lnB w="9525" cap="flat" cmpd="sng" algn="ctr">
                       <a:solidFill>
-                        <a:srgbClr val="9D7D4D"/>
+                        <a:srgbClr val="D8B279"/>
                       </a:solidFill>
                       <a:prstDash val="solid"/>
                     </a:lnB>
                     <a:solidFill>
-                      <a:srgbClr val="9D7D4D"/>
+                      <a:srgbClr val="D8B279"/>
                     </a:solidFill>
                   </a:tcPr>
                 </a:tc>
@@ -6272,7 +6472,7 @@
                       <a:r>
                         <a:rPr sz="1400" b="1">
                           <a:solidFill>
-                            <a:srgbClr val="FFFFFF"/>
+                            <a:srgbClr val="26231F"/>
                           </a:solidFill>
                         </a:rPr>
                         <a:t>가입 확인</a:t>
@@ -6282,30 +6482,30 @@
                   <a:tcPr anchor="ctr" marL="73152" marR="73152">
                     <a:lnL w="9525" cap="flat" cmpd="sng" algn="ctr">
                       <a:solidFill>
-                        <a:srgbClr val="9D7D4D"/>
+                        <a:srgbClr val="D8B279"/>
                       </a:solidFill>
                       <a:prstDash val="solid"/>
                     </a:lnL>
                     <a:lnR w="9525" cap="flat" cmpd="sng" algn="ctr">
                       <a:solidFill>
-                        <a:srgbClr val="9D7D4D"/>
+                        <a:srgbClr val="D8B279"/>
                       </a:solidFill>
                       <a:prstDash val="solid"/>
                     </a:lnR>
                     <a:lnT w="9525" cap="flat" cmpd="sng" algn="ctr">
                       <a:solidFill>
-                        <a:srgbClr val="9D7D4D"/>
+                        <a:srgbClr val="D8B279"/>
                       </a:solidFill>
                       <a:prstDash val="solid"/>
                     </a:lnT>
                     <a:lnB w="9525" cap="flat" cmpd="sng" algn="ctr">
                       <a:solidFill>
-                        <a:srgbClr val="9D7D4D"/>
+                        <a:srgbClr val="D8B279"/>
                       </a:solidFill>
                       <a:prstDash val="solid"/>
                     </a:lnB>
                     <a:solidFill>
-                      <a:srgbClr val="9D7D4D"/>
+                      <a:srgbClr val="D8B279"/>
                     </a:solidFill>
                   </a:tcPr>
                 </a:tc>
@@ -6318,7 +6518,7 @@
                       <a:r>
                         <a:rPr sz="1400" b="1">
                           <a:solidFill>
-                            <a:srgbClr val="FFFFFF"/>
+                            <a:srgbClr val="26231F"/>
                           </a:solidFill>
                         </a:rPr>
                         <a:t>확인 필요</a:t>
@@ -6328,30 +6528,30 @@
                   <a:tcPr anchor="ctr" marL="73152" marR="73152">
                     <a:lnL w="9525" cap="flat" cmpd="sng" algn="ctr">
                       <a:solidFill>
-                        <a:srgbClr val="9D7D4D"/>
+                        <a:srgbClr val="D8B279"/>
                       </a:solidFill>
                       <a:prstDash val="solid"/>
                     </a:lnL>
                     <a:lnR w="9525" cap="flat" cmpd="sng" algn="ctr">
                       <a:solidFill>
-                        <a:srgbClr val="9D7D4D"/>
+                        <a:srgbClr val="D8B279"/>
                       </a:solidFill>
                       <a:prstDash val="solid"/>
                     </a:lnR>
                     <a:lnT w="9525" cap="flat" cmpd="sng" algn="ctr">
                       <a:solidFill>
-                        <a:srgbClr val="9D7D4D"/>
+                        <a:srgbClr val="D8B279"/>
                       </a:solidFill>
                       <a:prstDash val="solid"/>
                     </a:lnT>
                     <a:lnB w="9525" cap="flat" cmpd="sng" algn="ctr">
                       <a:solidFill>
-                        <a:srgbClr val="9D7D4D"/>
+                        <a:srgbClr val="D8B279"/>
                       </a:solidFill>
                       <a:prstDash val="solid"/>
                     </a:lnB>
                     <a:solidFill>
-                      <a:srgbClr val="9D7D4D"/>
+                      <a:srgbClr val="D8B279"/>
                     </a:solidFill>
                   </a:tcPr>
                 </a:tc>
@@ -6364,7 +6564,7 @@
                       <a:r>
                         <a:rPr sz="1400" b="1">
                           <a:solidFill>
-                            <a:srgbClr val="FFFFFF"/>
+                            <a:srgbClr val="26231F"/>
                           </a:solidFill>
                         </a:rPr>
                         <a:t>해당 없음</a:t>
@@ -6374,30 +6574,30 @@
                   <a:tcPr anchor="ctr" marL="73152" marR="73152">
                     <a:lnL w="9525" cap="flat" cmpd="sng" algn="ctr">
                       <a:solidFill>
-                        <a:srgbClr val="9D7D4D"/>
+                        <a:srgbClr val="D8B279"/>
                       </a:solidFill>
                       <a:prstDash val="solid"/>
                     </a:lnL>
                     <a:lnR w="9525" cap="flat" cmpd="sng" algn="ctr">
                       <a:solidFill>
-                        <a:srgbClr val="9D7D4D"/>
+                        <a:srgbClr val="D8B279"/>
                       </a:solidFill>
                       <a:prstDash val="solid"/>
                     </a:lnR>
                     <a:lnT w="9525" cap="flat" cmpd="sng" algn="ctr">
                       <a:solidFill>
-                        <a:srgbClr val="9D7D4D"/>
+                        <a:srgbClr val="D8B279"/>
                       </a:solidFill>
                       <a:prstDash val="solid"/>
                     </a:lnT>
                     <a:lnB w="9525" cap="flat" cmpd="sng" algn="ctr">
                       <a:solidFill>
-                        <a:srgbClr val="9D7D4D"/>
+                        <a:srgbClr val="D8B279"/>
                       </a:solidFill>
                       <a:prstDash val="solid"/>
                     </a:lnB>
                     <a:solidFill>
-                      <a:srgbClr val="9D7D4D"/>
+                      <a:srgbClr val="D8B279"/>
                     </a:solidFill>
                   </a:tcPr>
                 </a:tc>
@@ -6412,7 +6612,7 @@
                       <a:r>
                         <a:rPr sz="1400" b="1">
                           <a:solidFill>
-                            <a:srgbClr val="59472C"/>
+                            <a:srgbClr val="493B27"/>
                           </a:solidFill>
                         </a:rPr>
                         <a:t>사망·재해</a:t>
@@ -6422,30 +6622,30 @@
                   <a:tcPr anchor="ctr" marL="73152" marR="73152">
                     <a:lnL w="9525" cap="flat" cmpd="sng" algn="ctr">
                       <a:solidFill>
-                        <a:srgbClr val="ECE3D4"/>
+                        <a:srgbClr val="F6E9D5"/>
                       </a:solidFill>
                       <a:prstDash val="solid"/>
                     </a:lnL>
                     <a:lnR w="9525" cap="flat" cmpd="sng" algn="ctr">
                       <a:solidFill>
-                        <a:srgbClr val="ECE3D4"/>
+                        <a:srgbClr val="F6E9D5"/>
                       </a:solidFill>
                       <a:prstDash val="solid"/>
                     </a:lnR>
                     <a:lnT w="9525" cap="flat" cmpd="sng" algn="ctr">
                       <a:solidFill>
-                        <a:srgbClr val="ECE3D4"/>
+                        <a:srgbClr val="F6E9D5"/>
                       </a:solidFill>
                       <a:prstDash val="solid"/>
                     </a:lnT>
                     <a:lnB w="9525" cap="flat" cmpd="sng" algn="ctr">
                       <a:solidFill>
-                        <a:srgbClr val="ECE3D4"/>
+                        <a:srgbClr val="F6E9D5"/>
                       </a:solidFill>
                       <a:prstDash val="solid"/>
                     </a:lnB>
                     <a:solidFill>
-                      <a:srgbClr val="ECE3D4"/>
+                      <a:srgbClr val="F6E9D5"/>
                     </a:solidFill>
                   </a:tcPr>
                 </a:tc>
@@ -6458,7 +6658,7 @@
                       <a:r>
                         <a:rPr sz="1400" b="0">
                           <a:solidFill>
-                            <a:srgbClr val="2B2B2B"/>
+                            <a:srgbClr val="26231F"/>
                           </a:solidFill>
                         </a:rPr>
                         <a:t>□</a:t>
@@ -6468,25 +6668,25 @@
                   <a:tcPr anchor="ctr" marL="73152" marR="73152">
                     <a:lnL w="9525" cap="flat" cmpd="sng" algn="ctr">
                       <a:solidFill>
-                        <a:srgbClr val="ECE3D4"/>
+                        <a:srgbClr val="F6E9D5"/>
                       </a:solidFill>
                       <a:prstDash val="solid"/>
                     </a:lnL>
                     <a:lnR w="9525" cap="flat" cmpd="sng" algn="ctr">
                       <a:solidFill>
-                        <a:srgbClr val="ECE3D4"/>
+                        <a:srgbClr val="F6E9D5"/>
                       </a:solidFill>
                       <a:prstDash val="solid"/>
                     </a:lnR>
                     <a:lnT w="9525" cap="flat" cmpd="sng" algn="ctr">
                       <a:solidFill>
-                        <a:srgbClr val="ECE3D4"/>
+                        <a:srgbClr val="F6E9D5"/>
                       </a:solidFill>
                       <a:prstDash val="solid"/>
                     </a:lnT>
                     <a:lnB w="9525" cap="flat" cmpd="sng" algn="ctr">
                       <a:solidFill>
-                        <a:srgbClr val="ECE3D4"/>
+                        <a:srgbClr val="F6E9D5"/>
                       </a:solidFill>
                       <a:prstDash val="solid"/>
                     </a:lnB>
@@ -6504,7 +6704,7 @@
                       <a:r>
                         <a:rPr sz="1400" b="0">
                           <a:solidFill>
-                            <a:srgbClr val="2B2B2B"/>
+                            <a:srgbClr val="26231F"/>
                           </a:solidFill>
                         </a:rPr>
                         <a:t>□</a:t>
@@ -6514,25 +6714,25 @@
                   <a:tcPr anchor="ctr" marL="73152" marR="73152">
                     <a:lnL w="9525" cap="flat" cmpd="sng" algn="ctr">
                       <a:solidFill>
-                        <a:srgbClr val="ECE3D4"/>
+                        <a:srgbClr val="F6E9D5"/>
                       </a:solidFill>
                       <a:prstDash val="solid"/>
                     </a:lnL>
                     <a:lnR w="9525" cap="flat" cmpd="sng" algn="ctr">
                       <a:solidFill>
-                        <a:srgbClr val="ECE3D4"/>
+                        <a:srgbClr val="F6E9D5"/>
                       </a:solidFill>
                       <a:prstDash val="solid"/>
                     </a:lnR>
                     <a:lnT w="9525" cap="flat" cmpd="sng" algn="ctr">
                       <a:solidFill>
-                        <a:srgbClr val="ECE3D4"/>
+                        <a:srgbClr val="F6E9D5"/>
                       </a:solidFill>
                       <a:prstDash val="solid"/>
                     </a:lnT>
                     <a:lnB w="9525" cap="flat" cmpd="sng" algn="ctr">
                       <a:solidFill>
-                        <a:srgbClr val="ECE3D4"/>
+                        <a:srgbClr val="F6E9D5"/>
                       </a:solidFill>
                       <a:prstDash val="solid"/>
                     </a:lnB>
@@ -6550,7 +6750,7 @@
                       <a:r>
                         <a:rPr sz="1400" b="0">
                           <a:solidFill>
-                            <a:srgbClr val="2B2B2B"/>
+                            <a:srgbClr val="26231F"/>
                           </a:solidFill>
                         </a:rPr>
                         <a:t>□</a:t>
@@ -6560,25 +6760,25 @@
                   <a:tcPr anchor="ctr" marL="73152" marR="73152">
                     <a:lnL w="9525" cap="flat" cmpd="sng" algn="ctr">
                       <a:solidFill>
-                        <a:srgbClr val="ECE3D4"/>
+                        <a:srgbClr val="F6E9D5"/>
                       </a:solidFill>
                       <a:prstDash val="solid"/>
                     </a:lnL>
                     <a:lnR w="9525" cap="flat" cmpd="sng" algn="ctr">
                       <a:solidFill>
-                        <a:srgbClr val="ECE3D4"/>
+                        <a:srgbClr val="F6E9D5"/>
                       </a:solidFill>
                       <a:prstDash val="solid"/>
                     </a:lnR>
                     <a:lnT w="9525" cap="flat" cmpd="sng" algn="ctr">
                       <a:solidFill>
-                        <a:srgbClr val="ECE3D4"/>
+                        <a:srgbClr val="F6E9D5"/>
                       </a:solidFill>
                       <a:prstDash val="solid"/>
                     </a:lnT>
                     <a:lnB w="9525" cap="flat" cmpd="sng" algn="ctr">
                       <a:solidFill>
-                        <a:srgbClr val="ECE3D4"/>
+                        <a:srgbClr val="F6E9D5"/>
                       </a:solidFill>
                       <a:prstDash val="solid"/>
                     </a:lnB>
@@ -6598,7 +6798,7 @@
                       <a:r>
                         <a:rPr sz="1400" b="1">
                           <a:solidFill>
-                            <a:srgbClr val="59472C"/>
+                            <a:srgbClr val="493B27"/>
                           </a:solidFill>
                         </a:rPr>
                         <a:t>질병 진단</a:t>
@@ -6608,30 +6808,30 @@
                   <a:tcPr anchor="ctr" marL="73152" marR="73152">
                     <a:lnL w="9525" cap="flat" cmpd="sng" algn="ctr">
                       <a:solidFill>
-                        <a:srgbClr val="ECE3D4"/>
+                        <a:srgbClr val="F6E9D5"/>
                       </a:solidFill>
                       <a:prstDash val="solid"/>
                     </a:lnL>
                     <a:lnR w="9525" cap="flat" cmpd="sng" algn="ctr">
                       <a:solidFill>
-                        <a:srgbClr val="ECE3D4"/>
+                        <a:srgbClr val="F6E9D5"/>
                       </a:solidFill>
                       <a:prstDash val="solid"/>
                     </a:lnR>
                     <a:lnT w="9525" cap="flat" cmpd="sng" algn="ctr">
                       <a:solidFill>
-                        <a:srgbClr val="ECE3D4"/>
+                        <a:srgbClr val="F6E9D5"/>
                       </a:solidFill>
                       <a:prstDash val="solid"/>
                     </a:lnT>
                     <a:lnB w="9525" cap="flat" cmpd="sng" algn="ctr">
                       <a:solidFill>
-                        <a:srgbClr val="ECE3D4"/>
+                        <a:srgbClr val="F6E9D5"/>
                       </a:solidFill>
                       <a:prstDash val="solid"/>
                     </a:lnB>
                     <a:solidFill>
-                      <a:srgbClr val="ECE3D4"/>
+                      <a:srgbClr val="F6E9D5"/>
                     </a:solidFill>
                   </a:tcPr>
                 </a:tc>
@@ -6644,7 +6844,7 @@
                       <a:r>
                         <a:rPr sz="1400" b="0">
                           <a:solidFill>
-                            <a:srgbClr val="2B2B2B"/>
+                            <a:srgbClr val="26231F"/>
                           </a:solidFill>
                         </a:rPr>
                         <a:t>□</a:t>
@@ -6654,30 +6854,30 @@
                   <a:tcPr anchor="ctr" marL="73152" marR="73152">
                     <a:lnL w="9525" cap="flat" cmpd="sng" algn="ctr">
                       <a:solidFill>
-                        <a:srgbClr val="ECE3D4"/>
+                        <a:srgbClr val="F6E9D5"/>
                       </a:solidFill>
                       <a:prstDash val="solid"/>
                     </a:lnL>
                     <a:lnR w="9525" cap="flat" cmpd="sng" algn="ctr">
                       <a:solidFill>
-                        <a:srgbClr val="ECE3D4"/>
+                        <a:srgbClr val="F6E9D5"/>
                       </a:solidFill>
                       <a:prstDash val="solid"/>
                     </a:lnR>
                     <a:lnT w="9525" cap="flat" cmpd="sng" algn="ctr">
                       <a:solidFill>
-                        <a:srgbClr val="ECE3D4"/>
+                        <a:srgbClr val="F6E9D5"/>
                       </a:solidFill>
                       <a:prstDash val="solid"/>
                     </a:lnT>
                     <a:lnB w="9525" cap="flat" cmpd="sng" algn="ctr">
                       <a:solidFill>
-                        <a:srgbClr val="ECE3D4"/>
+                        <a:srgbClr val="F6E9D5"/>
                       </a:solidFill>
                       <a:prstDash val="solid"/>
                     </a:lnB>
                     <a:solidFill>
-                      <a:srgbClr val="F8F5F1"/>
+                      <a:srgbClr val="FBF5EC"/>
                     </a:solidFill>
                   </a:tcPr>
                 </a:tc>
@@ -6690,7 +6890,7 @@
                       <a:r>
                         <a:rPr sz="1400" b="0">
                           <a:solidFill>
-                            <a:srgbClr val="2B2B2B"/>
+                            <a:srgbClr val="26231F"/>
                           </a:solidFill>
                         </a:rPr>
                         <a:t>□</a:t>
@@ -6700,30 +6900,30 @@
                   <a:tcPr anchor="ctr" marL="73152" marR="73152">
                     <a:lnL w="9525" cap="flat" cmpd="sng" algn="ctr">
                       <a:solidFill>
-                        <a:srgbClr val="ECE3D4"/>
+                        <a:srgbClr val="F6E9D5"/>
                       </a:solidFill>
                       <a:prstDash val="solid"/>
                     </a:lnL>
                     <a:lnR w="9525" cap="flat" cmpd="sng" algn="ctr">
                       <a:solidFill>
-                        <a:srgbClr val="ECE3D4"/>
+                        <a:srgbClr val="F6E9D5"/>
                       </a:solidFill>
                       <a:prstDash val="solid"/>
                     </a:lnR>
                     <a:lnT w="9525" cap="flat" cmpd="sng" algn="ctr">
                       <a:solidFill>
-                        <a:srgbClr val="ECE3D4"/>
+                        <a:srgbClr val="F6E9D5"/>
                       </a:solidFill>
                       <a:prstDash val="solid"/>
                     </a:lnT>
                     <a:lnB w="9525" cap="flat" cmpd="sng" algn="ctr">
                       <a:solidFill>
-                        <a:srgbClr val="ECE3D4"/>
+                        <a:srgbClr val="F6E9D5"/>
                       </a:solidFill>
                       <a:prstDash val="solid"/>
                     </a:lnB>
                     <a:solidFill>
-                      <a:srgbClr val="F8F5F1"/>
+                      <a:srgbClr val="FBF5EC"/>
                     </a:solidFill>
                   </a:tcPr>
                 </a:tc>
@@ -6736,7 +6936,7 @@
                       <a:r>
                         <a:rPr sz="1400" b="0">
                           <a:solidFill>
-                            <a:srgbClr val="2B2B2B"/>
+                            <a:srgbClr val="26231F"/>
                           </a:solidFill>
                         </a:rPr>
                         <a:t>□</a:t>
@@ -6746,30 +6946,30 @@
                   <a:tcPr anchor="ctr" marL="73152" marR="73152">
                     <a:lnL w="9525" cap="flat" cmpd="sng" algn="ctr">
                       <a:solidFill>
-                        <a:srgbClr val="ECE3D4"/>
+                        <a:srgbClr val="F6E9D5"/>
                       </a:solidFill>
                       <a:prstDash val="solid"/>
                     </a:lnL>
                     <a:lnR w="9525" cap="flat" cmpd="sng" algn="ctr">
                       <a:solidFill>
-                        <a:srgbClr val="ECE3D4"/>
+                        <a:srgbClr val="F6E9D5"/>
                       </a:solidFill>
                       <a:prstDash val="solid"/>
                     </a:lnR>
                     <a:lnT w="9525" cap="flat" cmpd="sng" algn="ctr">
                       <a:solidFill>
-                        <a:srgbClr val="ECE3D4"/>
+                        <a:srgbClr val="F6E9D5"/>
                       </a:solidFill>
                       <a:prstDash val="solid"/>
                     </a:lnT>
                     <a:lnB w="9525" cap="flat" cmpd="sng" algn="ctr">
                       <a:solidFill>
-                        <a:srgbClr val="ECE3D4"/>
+                        <a:srgbClr val="F6E9D5"/>
                       </a:solidFill>
                       <a:prstDash val="solid"/>
                     </a:lnB>
                     <a:solidFill>
-                      <a:srgbClr val="F8F5F1"/>
+                      <a:srgbClr val="FBF5EC"/>
                     </a:solidFill>
                   </a:tcPr>
                 </a:tc>
@@ -6784,7 +6984,7 @@
                       <a:r>
                         <a:rPr sz="1400" b="1">
                           <a:solidFill>
-                            <a:srgbClr val="59472C"/>
+                            <a:srgbClr val="493B27"/>
                           </a:solidFill>
                         </a:rPr>
                         <a:t>암</a:t>
@@ -6794,30 +6994,30 @@
                   <a:tcPr anchor="ctr" marL="73152" marR="73152">
                     <a:lnL w="9525" cap="flat" cmpd="sng" algn="ctr">
                       <a:solidFill>
-                        <a:srgbClr val="ECE3D4"/>
+                        <a:srgbClr val="F6E9D5"/>
                       </a:solidFill>
                       <a:prstDash val="solid"/>
                     </a:lnL>
                     <a:lnR w="9525" cap="flat" cmpd="sng" algn="ctr">
                       <a:solidFill>
-                        <a:srgbClr val="ECE3D4"/>
+                        <a:srgbClr val="F6E9D5"/>
                       </a:solidFill>
                       <a:prstDash val="solid"/>
                     </a:lnR>
                     <a:lnT w="9525" cap="flat" cmpd="sng" algn="ctr">
                       <a:solidFill>
-                        <a:srgbClr val="ECE3D4"/>
+                        <a:srgbClr val="F6E9D5"/>
                       </a:solidFill>
                       <a:prstDash val="solid"/>
                     </a:lnT>
                     <a:lnB w="9525" cap="flat" cmpd="sng" algn="ctr">
                       <a:solidFill>
-                        <a:srgbClr val="ECE3D4"/>
+                        <a:srgbClr val="F6E9D5"/>
                       </a:solidFill>
                       <a:prstDash val="solid"/>
                     </a:lnB>
                     <a:solidFill>
-                      <a:srgbClr val="ECE3D4"/>
+                      <a:srgbClr val="F6E9D5"/>
                     </a:solidFill>
                   </a:tcPr>
                 </a:tc>
@@ -6830,7 +7030,7 @@
                       <a:r>
                         <a:rPr sz="1400" b="0">
                           <a:solidFill>
-                            <a:srgbClr val="2B2B2B"/>
+                            <a:srgbClr val="26231F"/>
                           </a:solidFill>
                         </a:rPr>
                         <a:t>□</a:t>
@@ -6840,25 +7040,25 @@
                   <a:tcPr anchor="ctr" marL="73152" marR="73152">
                     <a:lnL w="9525" cap="flat" cmpd="sng" algn="ctr">
                       <a:solidFill>
-                        <a:srgbClr val="ECE3D4"/>
+                        <a:srgbClr val="F6E9D5"/>
                       </a:solidFill>
                       <a:prstDash val="solid"/>
                     </a:lnL>
                     <a:lnR w="9525" cap="flat" cmpd="sng" algn="ctr">
                       <a:solidFill>
-                        <a:srgbClr val="ECE3D4"/>
+                        <a:srgbClr val="F6E9D5"/>
                       </a:solidFill>
                       <a:prstDash val="solid"/>
                     </a:lnR>
                     <a:lnT w="9525" cap="flat" cmpd="sng" algn="ctr">
                       <a:solidFill>
-                        <a:srgbClr val="ECE3D4"/>
+                        <a:srgbClr val="F6E9D5"/>
                       </a:solidFill>
                       <a:prstDash val="solid"/>
                     </a:lnT>
                     <a:lnB w="9525" cap="flat" cmpd="sng" algn="ctr">
                       <a:solidFill>
-                        <a:srgbClr val="ECE3D4"/>
+                        <a:srgbClr val="F6E9D5"/>
                       </a:solidFill>
                       <a:prstDash val="solid"/>
                     </a:lnB>
@@ -6876,7 +7076,7 @@
                       <a:r>
                         <a:rPr sz="1400" b="0">
                           <a:solidFill>
-                            <a:srgbClr val="2B2B2B"/>
+                            <a:srgbClr val="26231F"/>
                           </a:solidFill>
                         </a:rPr>
                         <a:t>□</a:t>
@@ -6886,25 +7086,25 @@
                   <a:tcPr anchor="ctr" marL="73152" marR="73152">
                     <a:lnL w="9525" cap="flat" cmpd="sng" algn="ctr">
                       <a:solidFill>
-                        <a:srgbClr val="ECE3D4"/>
+                        <a:srgbClr val="F6E9D5"/>
                       </a:solidFill>
                       <a:prstDash val="solid"/>
                     </a:lnL>
                     <a:lnR w="9525" cap="flat" cmpd="sng" algn="ctr">
                       <a:solidFill>
-                        <a:srgbClr val="ECE3D4"/>
+                        <a:srgbClr val="F6E9D5"/>
                       </a:solidFill>
                       <a:prstDash val="solid"/>
                     </a:lnR>
                     <a:lnT w="9525" cap="flat" cmpd="sng" algn="ctr">
                       <a:solidFill>
-                        <a:srgbClr val="ECE3D4"/>
+                        <a:srgbClr val="F6E9D5"/>
                       </a:solidFill>
                       <a:prstDash val="solid"/>
                     </a:lnT>
                     <a:lnB w="9525" cap="flat" cmpd="sng" algn="ctr">
                       <a:solidFill>
-                        <a:srgbClr val="ECE3D4"/>
+                        <a:srgbClr val="F6E9D5"/>
                       </a:solidFill>
                       <a:prstDash val="solid"/>
                     </a:lnB>
@@ -6922,7 +7122,7 @@
                       <a:r>
                         <a:rPr sz="1400" b="0">
                           <a:solidFill>
-                            <a:srgbClr val="2B2B2B"/>
+                            <a:srgbClr val="26231F"/>
                           </a:solidFill>
                         </a:rPr>
                         <a:t>□</a:t>
@@ -6932,25 +7132,25 @@
                   <a:tcPr anchor="ctr" marL="73152" marR="73152">
                     <a:lnL w="9525" cap="flat" cmpd="sng" algn="ctr">
                       <a:solidFill>
-                        <a:srgbClr val="ECE3D4"/>
+                        <a:srgbClr val="F6E9D5"/>
                       </a:solidFill>
                       <a:prstDash val="solid"/>
                     </a:lnL>
                     <a:lnR w="9525" cap="flat" cmpd="sng" algn="ctr">
                       <a:solidFill>
-                        <a:srgbClr val="ECE3D4"/>
+                        <a:srgbClr val="F6E9D5"/>
                       </a:solidFill>
                       <a:prstDash val="solid"/>
                     </a:lnR>
                     <a:lnT w="9525" cap="flat" cmpd="sng" algn="ctr">
                       <a:solidFill>
-                        <a:srgbClr val="ECE3D4"/>
+                        <a:srgbClr val="F6E9D5"/>
                       </a:solidFill>
                       <a:prstDash val="solid"/>
                     </a:lnT>
                     <a:lnB w="9525" cap="flat" cmpd="sng" algn="ctr">
                       <a:solidFill>
-                        <a:srgbClr val="ECE3D4"/>
+                        <a:srgbClr val="F6E9D5"/>
                       </a:solidFill>
                       <a:prstDash val="solid"/>
                     </a:lnB>
@@ -6970,7 +7170,7 @@
                       <a:r>
                         <a:rPr sz="1400" b="1">
                           <a:solidFill>
-                            <a:srgbClr val="59472C"/>
+                            <a:srgbClr val="493B27"/>
                           </a:solidFill>
                         </a:rPr>
                         <a:t>뇌·심장</a:t>
@@ -6980,30 +7180,30 @@
                   <a:tcPr anchor="ctr" marL="73152" marR="73152">
                     <a:lnL w="9525" cap="flat" cmpd="sng" algn="ctr">
                       <a:solidFill>
-                        <a:srgbClr val="ECE3D4"/>
+                        <a:srgbClr val="F6E9D5"/>
                       </a:solidFill>
                       <a:prstDash val="solid"/>
                     </a:lnL>
                     <a:lnR w="9525" cap="flat" cmpd="sng" algn="ctr">
                       <a:solidFill>
-                        <a:srgbClr val="ECE3D4"/>
+                        <a:srgbClr val="F6E9D5"/>
                       </a:solidFill>
                       <a:prstDash val="solid"/>
                     </a:lnR>
                     <a:lnT w="9525" cap="flat" cmpd="sng" algn="ctr">
                       <a:solidFill>
-                        <a:srgbClr val="ECE3D4"/>
+                        <a:srgbClr val="F6E9D5"/>
                       </a:solidFill>
                       <a:prstDash val="solid"/>
                     </a:lnT>
                     <a:lnB w="9525" cap="flat" cmpd="sng" algn="ctr">
                       <a:solidFill>
-                        <a:srgbClr val="ECE3D4"/>
+                        <a:srgbClr val="F6E9D5"/>
                       </a:solidFill>
                       <a:prstDash val="solid"/>
                     </a:lnB>
                     <a:solidFill>
-                      <a:srgbClr val="ECE3D4"/>
+                      <a:srgbClr val="F6E9D5"/>
                     </a:solidFill>
                   </a:tcPr>
                 </a:tc>
@@ -7016,7 +7216,7 @@
                       <a:r>
                         <a:rPr sz="1400" b="0">
                           <a:solidFill>
-                            <a:srgbClr val="2B2B2B"/>
+                            <a:srgbClr val="26231F"/>
                           </a:solidFill>
                         </a:rPr>
                         <a:t>□</a:t>
@@ -7026,30 +7226,30 @@
                   <a:tcPr anchor="ctr" marL="73152" marR="73152">
                     <a:lnL w="9525" cap="flat" cmpd="sng" algn="ctr">
                       <a:solidFill>
-                        <a:srgbClr val="ECE3D4"/>
+                        <a:srgbClr val="F6E9D5"/>
                       </a:solidFill>
                       <a:prstDash val="solid"/>
                     </a:lnL>
                     <a:lnR w="9525" cap="flat" cmpd="sng" algn="ctr">
                       <a:solidFill>
-                        <a:srgbClr val="ECE3D4"/>
+                        <a:srgbClr val="F6E9D5"/>
                       </a:solidFill>
                       <a:prstDash val="solid"/>
                     </a:lnR>
                     <a:lnT w="9525" cap="flat" cmpd="sng" algn="ctr">
                       <a:solidFill>
-                        <a:srgbClr val="ECE3D4"/>
+                        <a:srgbClr val="F6E9D5"/>
                       </a:solidFill>
                       <a:prstDash val="solid"/>
                     </a:lnT>
                     <a:lnB w="9525" cap="flat" cmpd="sng" algn="ctr">
                       <a:solidFill>
-                        <a:srgbClr val="ECE3D4"/>
+                        <a:srgbClr val="F6E9D5"/>
                       </a:solidFill>
                       <a:prstDash val="solid"/>
                     </a:lnB>
                     <a:solidFill>
-                      <a:srgbClr val="F8F5F1"/>
+                      <a:srgbClr val="FBF5EC"/>
                     </a:solidFill>
                   </a:tcPr>
                 </a:tc>
@@ -7062,7 +7262,7 @@
                       <a:r>
                         <a:rPr sz="1400" b="0">
                           <a:solidFill>
-                            <a:srgbClr val="2B2B2B"/>
+                            <a:srgbClr val="26231F"/>
                           </a:solidFill>
                         </a:rPr>
                         <a:t>□</a:t>
@@ -7072,30 +7272,30 @@
                   <a:tcPr anchor="ctr" marL="73152" marR="73152">
                     <a:lnL w="9525" cap="flat" cmpd="sng" algn="ctr">
                       <a:solidFill>
-                        <a:srgbClr val="ECE3D4"/>
+                        <a:srgbClr val="F6E9D5"/>
                       </a:solidFill>
                       <a:prstDash val="solid"/>
                     </a:lnL>
                     <a:lnR w="9525" cap="flat" cmpd="sng" algn="ctr">
                       <a:solidFill>
-                        <a:srgbClr val="ECE3D4"/>
+                        <a:srgbClr val="F6E9D5"/>
                       </a:solidFill>
                       <a:prstDash val="solid"/>
                     </a:lnR>
                     <a:lnT w="9525" cap="flat" cmpd="sng" algn="ctr">
                       <a:solidFill>
-                        <a:srgbClr val="ECE3D4"/>
+                        <a:srgbClr val="F6E9D5"/>
                       </a:solidFill>
                       <a:prstDash val="solid"/>
                     </a:lnT>
                     <a:lnB w="9525" cap="flat" cmpd="sng" algn="ctr">
                       <a:solidFill>
-                        <a:srgbClr val="ECE3D4"/>
+                        <a:srgbClr val="F6E9D5"/>
                       </a:solidFill>
                       <a:prstDash val="solid"/>
                     </a:lnB>
                     <a:solidFill>
-                      <a:srgbClr val="F8F5F1"/>
+                      <a:srgbClr val="FBF5EC"/>
                     </a:solidFill>
                   </a:tcPr>
                 </a:tc>
@@ -7108,7 +7308,7 @@
                       <a:r>
                         <a:rPr sz="1400" b="0">
                           <a:solidFill>
-                            <a:srgbClr val="2B2B2B"/>
+                            <a:srgbClr val="26231F"/>
                           </a:solidFill>
                         </a:rPr>
                         <a:t>□</a:t>
@@ -7118,30 +7318,30 @@
                   <a:tcPr anchor="ctr" marL="73152" marR="73152">
                     <a:lnL w="9525" cap="flat" cmpd="sng" algn="ctr">
                       <a:solidFill>
-                        <a:srgbClr val="ECE3D4"/>
+                        <a:srgbClr val="F6E9D5"/>
                       </a:solidFill>
                       <a:prstDash val="solid"/>
                     </a:lnL>
                     <a:lnR w="9525" cap="flat" cmpd="sng" algn="ctr">
                       <a:solidFill>
-                        <a:srgbClr val="ECE3D4"/>
+                        <a:srgbClr val="F6E9D5"/>
                       </a:solidFill>
                       <a:prstDash val="solid"/>
                     </a:lnR>
                     <a:lnT w="9525" cap="flat" cmpd="sng" algn="ctr">
                       <a:solidFill>
-                        <a:srgbClr val="ECE3D4"/>
+                        <a:srgbClr val="F6E9D5"/>
                       </a:solidFill>
                       <a:prstDash val="solid"/>
                     </a:lnT>
                     <a:lnB w="9525" cap="flat" cmpd="sng" algn="ctr">
                       <a:solidFill>
-                        <a:srgbClr val="ECE3D4"/>
+                        <a:srgbClr val="F6E9D5"/>
                       </a:solidFill>
                       <a:prstDash val="solid"/>
                     </a:lnB>
                     <a:solidFill>
-                      <a:srgbClr val="F8F5F1"/>
+                      <a:srgbClr val="FBF5EC"/>
                     </a:solidFill>
                   </a:tcPr>
                 </a:tc>
@@ -7156,7 +7356,7 @@
                       <a:r>
                         <a:rPr sz="1400" b="1">
                           <a:solidFill>
-                            <a:srgbClr val="59472C"/>
+                            <a:srgbClr val="493B27"/>
                           </a:solidFill>
                         </a:rPr>
                         <a:t>입원·수술</a:t>
@@ -7166,30 +7366,30 @@
                   <a:tcPr anchor="ctr" marL="73152" marR="73152">
                     <a:lnL w="9525" cap="flat" cmpd="sng" algn="ctr">
                       <a:solidFill>
-                        <a:srgbClr val="ECE3D4"/>
+                        <a:srgbClr val="F6E9D5"/>
                       </a:solidFill>
                       <a:prstDash val="solid"/>
                     </a:lnL>
                     <a:lnR w="9525" cap="flat" cmpd="sng" algn="ctr">
                       <a:solidFill>
-                        <a:srgbClr val="ECE3D4"/>
+                        <a:srgbClr val="F6E9D5"/>
                       </a:solidFill>
                       <a:prstDash val="solid"/>
                     </a:lnR>
                     <a:lnT w="9525" cap="flat" cmpd="sng" algn="ctr">
                       <a:solidFill>
-                        <a:srgbClr val="ECE3D4"/>
+                        <a:srgbClr val="F6E9D5"/>
                       </a:solidFill>
                       <a:prstDash val="solid"/>
                     </a:lnT>
                     <a:lnB w="9525" cap="flat" cmpd="sng" algn="ctr">
                       <a:solidFill>
-                        <a:srgbClr val="ECE3D4"/>
+                        <a:srgbClr val="F6E9D5"/>
                       </a:solidFill>
                       <a:prstDash val="solid"/>
                     </a:lnB>
                     <a:solidFill>
-                      <a:srgbClr val="ECE3D4"/>
+                      <a:srgbClr val="F6E9D5"/>
                     </a:solidFill>
                   </a:tcPr>
                 </a:tc>
@@ -7202,7 +7402,7 @@
                       <a:r>
                         <a:rPr sz="1400" b="0">
                           <a:solidFill>
-                            <a:srgbClr val="2B2B2B"/>
+                            <a:srgbClr val="26231F"/>
                           </a:solidFill>
                         </a:rPr>
                         <a:t>□</a:t>
@@ -7212,25 +7412,25 @@
                   <a:tcPr anchor="ctr" marL="73152" marR="73152">
                     <a:lnL w="9525" cap="flat" cmpd="sng" algn="ctr">
                       <a:solidFill>
-                        <a:srgbClr val="ECE3D4"/>
+                        <a:srgbClr val="F6E9D5"/>
                       </a:solidFill>
                       <a:prstDash val="solid"/>
                     </a:lnL>
                     <a:lnR w="9525" cap="flat" cmpd="sng" algn="ctr">
                       <a:solidFill>
-                        <a:srgbClr val="ECE3D4"/>
+                        <a:srgbClr val="F6E9D5"/>
                       </a:solidFill>
                       <a:prstDash val="solid"/>
                     </a:lnR>
                     <a:lnT w="9525" cap="flat" cmpd="sng" algn="ctr">
                       <a:solidFill>
-                        <a:srgbClr val="ECE3D4"/>
+                        <a:srgbClr val="F6E9D5"/>
                       </a:solidFill>
                       <a:prstDash val="solid"/>
                     </a:lnT>
                     <a:lnB w="9525" cap="flat" cmpd="sng" algn="ctr">
                       <a:solidFill>
-                        <a:srgbClr val="ECE3D4"/>
+                        <a:srgbClr val="F6E9D5"/>
                       </a:solidFill>
                       <a:prstDash val="solid"/>
                     </a:lnB>
@@ -7248,7 +7448,7 @@
                       <a:r>
                         <a:rPr sz="1400" b="0">
                           <a:solidFill>
-                            <a:srgbClr val="2B2B2B"/>
+                            <a:srgbClr val="26231F"/>
                           </a:solidFill>
                         </a:rPr>
                         <a:t>□</a:t>
@@ -7258,25 +7458,25 @@
                   <a:tcPr anchor="ctr" marL="73152" marR="73152">
                     <a:lnL w="9525" cap="flat" cmpd="sng" algn="ctr">
                       <a:solidFill>
-                        <a:srgbClr val="ECE3D4"/>
+                        <a:srgbClr val="F6E9D5"/>
                       </a:solidFill>
                       <a:prstDash val="solid"/>
                     </a:lnL>
                     <a:lnR w="9525" cap="flat" cmpd="sng" algn="ctr">
                       <a:solidFill>
-                        <a:srgbClr val="ECE3D4"/>
+                        <a:srgbClr val="F6E9D5"/>
                       </a:solidFill>
                       <a:prstDash val="solid"/>
                     </a:lnR>
                     <a:lnT w="9525" cap="flat" cmpd="sng" algn="ctr">
                       <a:solidFill>
-                        <a:srgbClr val="ECE3D4"/>
+                        <a:srgbClr val="F6E9D5"/>
                       </a:solidFill>
                       <a:prstDash val="solid"/>
                     </a:lnT>
                     <a:lnB w="9525" cap="flat" cmpd="sng" algn="ctr">
                       <a:solidFill>
-                        <a:srgbClr val="ECE3D4"/>
+                        <a:srgbClr val="F6E9D5"/>
                       </a:solidFill>
                       <a:prstDash val="solid"/>
                     </a:lnB>
@@ -7294,7 +7494,7 @@
                       <a:r>
                         <a:rPr sz="1400" b="0">
                           <a:solidFill>
-                            <a:srgbClr val="2B2B2B"/>
+                            <a:srgbClr val="26231F"/>
                           </a:solidFill>
                         </a:rPr>
                         <a:t>□</a:t>
@@ -7304,25 +7504,25 @@
                   <a:tcPr anchor="ctr" marL="73152" marR="73152">
                     <a:lnL w="9525" cap="flat" cmpd="sng" algn="ctr">
                       <a:solidFill>
-                        <a:srgbClr val="ECE3D4"/>
+                        <a:srgbClr val="F6E9D5"/>
                       </a:solidFill>
                       <a:prstDash val="solid"/>
                     </a:lnL>
                     <a:lnR w="9525" cap="flat" cmpd="sng" algn="ctr">
                       <a:solidFill>
-                        <a:srgbClr val="ECE3D4"/>
+                        <a:srgbClr val="F6E9D5"/>
                       </a:solidFill>
                       <a:prstDash val="solid"/>
                     </a:lnR>
                     <a:lnT w="9525" cap="flat" cmpd="sng" algn="ctr">
                       <a:solidFill>
-                        <a:srgbClr val="ECE3D4"/>
+                        <a:srgbClr val="F6E9D5"/>
                       </a:solidFill>
                       <a:prstDash val="solid"/>
                     </a:lnT>
                     <a:lnB w="9525" cap="flat" cmpd="sng" algn="ctr">
                       <a:solidFill>
-                        <a:srgbClr val="ECE3D4"/>
+                        <a:srgbClr val="F6E9D5"/>
                       </a:solidFill>
                       <a:prstDash val="solid"/>
                     </a:lnB>
@@ -7342,7 +7542,7 @@
                       <a:r>
                         <a:rPr sz="1400" b="1">
                           <a:solidFill>
-                            <a:srgbClr val="59472C"/>
+                            <a:srgbClr val="493B27"/>
                           </a:solidFill>
                         </a:rPr>
                         <a:t>상해</a:t>
@@ -7352,30 +7552,30 @@
                   <a:tcPr anchor="ctr" marL="73152" marR="73152">
                     <a:lnL w="9525" cap="flat" cmpd="sng" algn="ctr">
                       <a:solidFill>
-                        <a:srgbClr val="ECE3D4"/>
+                        <a:srgbClr val="F6E9D5"/>
                       </a:solidFill>
                       <a:prstDash val="solid"/>
                     </a:lnL>
                     <a:lnR w="9525" cap="flat" cmpd="sng" algn="ctr">
                       <a:solidFill>
-                        <a:srgbClr val="ECE3D4"/>
+                        <a:srgbClr val="F6E9D5"/>
                       </a:solidFill>
                       <a:prstDash val="solid"/>
                     </a:lnR>
                     <a:lnT w="9525" cap="flat" cmpd="sng" algn="ctr">
                       <a:solidFill>
-                        <a:srgbClr val="ECE3D4"/>
+                        <a:srgbClr val="F6E9D5"/>
                       </a:solidFill>
                       <a:prstDash val="solid"/>
                     </a:lnT>
                     <a:lnB w="9525" cap="flat" cmpd="sng" algn="ctr">
                       <a:solidFill>
-                        <a:srgbClr val="ECE3D4"/>
+                        <a:srgbClr val="F6E9D5"/>
                       </a:solidFill>
                       <a:prstDash val="solid"/>
                     </a:lnB>
                     <a:solidFill>
-                      <a:srgbClr val="ECE3D4"/>
+                      <a:srgbClr val="F6E9D5"/>
                     </a:solidFill>
                   </a:tcPr>
                 </a:tc>
@@ -7388,7 +7588,7 @@
                       <a:r>
                         <a:rPr sz="1400" b="0">
                           <a:solidFill>
-                            <a:srgbClr val="2B2B2B"/>
+                            <a:srgbClr val="26231F"/>
                           </a:solidFill>
                         </a:rPr>
                         <a:t>□</a:t>
@@ -7398,30 +7598,30 @@
                   <a:tcPr anchor="ctr" marL="73152" marR="73152">
                     <a:lnL w="9525" cap="flat" cmpd="sng" algn="ctr">
                       <a:solidFill>
-                        <a:srgbClr val="ECE3D4"/>
+                        <a:srgbClr val="F6E9D5"/>
                       </a:solidFill>
                       <a:prstDash val="solid"/>
                     </a:lnL>
                     <a:lnR w="9525" cap="flat" cmpd="sng" algn="ctr">
                       <a:solidFill>
-                        <a:srgbClr val="ECE3D4"/>
+                        <a:srgbClr val="F6E9D5"/>
                       </a:solidFill>
                       <a:prstDash val="solid"/>
                     </a:lnR>
                     <a:lnT w="9525" cap="flat" cmpd="sng" algn="ctr">
                       <a:solidFill>
-                        <a:srgbClr val="ECE3D4"/>
+                        <a:srgbClr val="F6E9D5"/>
                       </a:solidFill>
                       <a:prstDash val="solid"/>
                     </a:lnT>
                     <a:lnB w="9525" cap="flat" cmpd="sng" algn="ctr">
                       <a:solidFill>
-                        <a:srgbClr val="ECE3D4"/>
+                        <a:srgbClr val="F6E9D5"/>
                       </a:solidFill>
                       <a:prstDash val="solid"/>
                     </a:lnB>
                     <a:solidFill>
-                      <a:srgbClr val="F8F5F1"/>
+                      <a:srgbClr val="FBF5EC"/>
                     </a:solidFill>
                   </a:tcPr>
                 </a:tc>
@@ -7434,7 +7634,7 @@
                       <a:r>
                         <a:rPr sz="1400" b="0">
                           <a:solidFill>
-                            <a:srgbClr val="2B2B2B"/>
+                            <a:srgbClr val="26231F"/>
                           </a:solidFill>
                         </a:rPr>
                         <a:t>□</a:t>
@@ -7444,30 +7644,30 @@
                   <a:tcPr anchor="ctr" marL="73152" marR="73152">
                     <a:lnL w="9525" cap="flat" cmpd="sng" algn="ctr">
                       <a:solidFill>
-                        <a:srgbClr val="ECE3D4"/>
+                        <a:srgbClr val="F6E9D5"/>
                       </a:solidFill>
                       <a:prstDash val="solid"/>
                     </a:lnL>
                     <a:lnR w="9525" cap="flat" cmpd="sng" algn="ctr">
                       <a:solidFill>
-                        <a:srgbClr val="ECE3D4"/>
+                        <a:srgbClr val="F6E9D5"/>
                       </a:solidFill>
                       <a:prstDash val="solid"/>
                     </a:lnR>
                     <a:lnT w="9525" cap="flat" cmpd="sng" algn="ctr">
                       <a:solidFill>
-                        <a:srgbClr val="ECE3D4"/>
+                        <a:srgbClr val="F6E9D5"/>
                       </a:solidFill>
                       <a:prstDash val="solid"/>
                     </a:lnT>
                     <a:lnB w="9525" cap="flat" cmpd="sng" algn="ctr">
                       <a:solidFill>
-                        <a:srgbClr val="ECE3D4"/>
+                        <a:srgbClr val="F6E9D5"/>
                       </a:solidFill>
                       <a:prstDash val="solid"/>
                     </a:lnB>
                     <a:solidFill>
-                      <a:srgbClr val="F8F5F1"/>
+                      <a:srgbClr val="FBF5EC"/>
                     </a:solidFill>
                   </a:tcPr>
                 </a:tc>
@@ -7480,7 +7680,7 @@
                       <a:r>
                         <a:rPr sz="1400" b="0">
                           <a:solidFill>
-                            <a:srgbClr val="2B2B2B"/>
+                            <a:srgbClr val="26231F"/>
                           </a:solidFill>
                         </a:rPr>
                         <a:t>□</a:t>
@@ -7490,30 +7690,30 @@
                   <a:tcPr anchor="ctr" marL="73152" marR="73152">
                     <a:lnL w="9525" cap="flat" cmpd="sng" algn="ctr">
                       <a:solidFill>
-                        <a:srgbClr val="ECE3D4"/>
+                        <a:srgbClr val="F6E9D5"/>
                       </a:solidFill>
                       <a:prstDash val="solid"/>
                     </a:lnL>
                     <a:lnR w="9525" cap="flat" cmpd="sng" algn="ctr">
                       <a:solidFill>
-                        <a:srgbClr val="ECE3D4"/>
+                        <a:srgbClr val="F6E9D5"/>
                       </a:solidFill>
                       <a:prstDash val="solid"/>
                     </a:lnR>
                     <a:lnT w="9525" cap="flat" cmpd="sng" algn="ctr">
                       <a:solidFill>
-                        <a:srgbClr val="ECE3D4"/>
+                        <a:srgbClr val="F6E9D5"/>
                       </a:solidFill>
                       <a:prstDash val="solid"/>
                     </a:lnT>
                     <a:lnB w="9525" cap="flat" cmpd="sng" algn="ctr">
                       <a:solidFill>
-                        <a:srgbClr val="ECE3D4"/>
+                        <a:srgbClr val="F6E9D5"/>
                       </a:solidFill>
                       <a:prstDash val="solid"/>
                     </a:lnB>
                     <a:solidFill>
-                      <a:srgbClr val="F8F5F1"/>
+                      <a:srgbClr val="FBF5EC"/>
                     </a:solidFill>
                   </a:tcPr>
                 </a:tc>
@@ -7528,7 +7728,7 @@
                       <a:r>
                         <a:rPr sz="1400" b="1">
                           <a:solidFill>
-                            <a:srgbClr val="59472C"/>
+                            <a:srgbClr val="493B27"/>
                           </a:solidFill>
                         </a:rPr>
                         <a:t>실손의료</a:t>
@@ -7538,30 +7738,30 @@
                   <a:tcPr anchor="ctr" marL="73152" marR="73152">
                     <a:lnL w="9525" cap="flat" cmpd="sng" algn="ctr">
                       <a:solidFill>
-                        <a:srgbClr val="ECE3D4"/>
+                        <a:srgbClr val="F6E9D5"/>
                       </a:solidFill>
                       <a:prstDash val="solid"/>
                     </a:lnL>
                     <a:lnR w="9525" cap="flat" cmpd="sng" algn="ctr">
                       <a:solidFill>
-                        <a:srgbClr val="ECE3D4"/>
+                        <a:srgbClr val="F6E9D5"/>
                       </a:solidFill>
                       <a:prstDash val="solid"/>
                     </a:lnR>
                     <a:lnT w="9525" cap="flat" cmpd="sng" algn="ctr">
                       <a:solidFill>
-                        <a:srgbClr val="ECE3D4"/>
+                        <a:srgbClr val="F6E9D5"/>
                       </a:solidFill>
                       <a:prstDash val="solid"/>
                     </a:lnT>
                     <a:lnB w="9525" cap="flat" cmpd="sng" algn="ctr">
                       <a:solidFill>
-                        <a:srgbClr val="ECE3D4"/>
+                        <a:srgbClr val="F6E9D5"/>
                       </a:solidFill>
                       <a:prstDash val="solid"/>
                     </a:lnB>
                     <a:solidFill>
-                      <a:srgbClr val="ECE3D4"/>
+                      <a:srgbClr val="F6E9D5"/>
                     </a:solidFill>
                   </a:tcPr>
                 </a:tc>
@@ -7574,7 +7774,7 @@
                       <a:r>
                         <a:rPr sz="1400" b="0">
                           <a:solidFill>
-                            <a:srgbClr val="2B2B2B"/>
+                            <a:srgbClr val="26231F"/>
                           </a:solidFill>
                         </a:rPr>
                         <a:t>□</a:t>
@@ -7584,25 +7784,25 @@
                   <a:tcPr anchor="ctr" marL="73152" marR="73152">
                     <a:lnL w="9525" cap="flat" cmpd="sng" algn="ctr">
                       <a:solidFill>
-                        <a:srgbClr val="ECE3D4"/>
+                        <a:srgbClr val="F6E9D5"/>
                       </a:solidFill>
                       <a:prstDash val="solid"/>
                     </a:lnL>
                     <a:lnR w="9525" cap="flat" cmpd="sng" algn="ctr">
                       <a:solidFill>
-                        <a:srgbClr val="ECE3D4"/>
+                        <a:srgbClr val="F6E9D5"/>
                       </a:solidFill>
                       <a:prstDash val="solid"/>
                     </a:lnR>
                     <a:lnT w="9525" cap="flat" cmpd="sng" algn="ctr">
                       <a:solidFill>
-                        <a:srgbClr val="ECE3D4"/>
+                        <a:srgbClr val="F6E9D5"/>
                       </a:solidFill>
                       <a:prstDash val="solid"/>
                     </a:lnT>
                     <a:lnB w="9525" cap="flat" cmpd="sng" algn="ctr">
                       <a:solidFill>
-                        <a:srgbClr val="ECE3D4"/>
+                        <a:srgbClr val="F6E9D5"/>
                       </a:solidFill>
                       <a:prstDash val="solid"/>
                     </a:lnB>
@@ -7620,7 +7820,7 @@
                       <a:r>
                         <a:rPr sz="1400" b="0">
                           <a:solidFill>
-                            <a:srgbClr val="2B2B2B"/>
+                            <a:srgbClr val="26231F"/>
                           </a:solidFill>
                         </a:rPr>
                         <a:t>□</a:t>
@@ -7630,25 +7830,25 @@
                   <a:tcPr anchor="ctr" marL="73152" marR="73152">
                     <a:lnL w="9525" cap="flat" cmpd="sng" algn="ctr">
                       <a:solidFill>
-                        <a:srgbClr val="ECE3D4"/>
+                        <a:srgbClr val="F6E9D5"/>
                       </a:solidFill>
                       <a:prstDash val="solid"/>
                     </a:lnL>
                     <a:lnR w="9525" cap="flat" cmpd="sng" algn="ctr">
                       <a:solidFill>
-                        <a:srgbClr val="ECE3D4"/>
+                        <a:srgbClr val="F6E9D5"/>
                       </a:solidFill>
                       <a:prstDash val="solid"/>
                     </a:lnR>
                     <a:lnT w="9525" cap="flat" cmpd="sng" algn="ctr">
                       <a:solidFill>
-                        <a:srgbClr val="ECE3D4"/>
+                        <a:srgbClr val="F6E9D5"/>
                       </a:solidFill>
                       <a:prstDash val="solid"/>
                     </a:lnT>
                     <a:lnB w="9525" cap="flat" cmpd="sng" algn="ctr">
                       <a:solidFill>
-                        <a:srgbClr val="ECE3D4"/>
+                        <a:srgbClr val="F6E9D5"/>
                       </a:solidFill>
                       <a:prstDash val="solid"/>
                     </a:lnB>
@@ -7666,7 +7866,7 @@
                       <a:r>
                         <a:rPr sz="1400" b="0">
                           <a:solidFill>
-                            <a:srgbClr val="2B2B2B"/>
+                            <a:srgbClr val="26231F"/>
                           </a:solidFill>
                         </a:rPr>
                         <a:t>□</a:t>
@@ -7676,25 +7876,25 @@
                   <a:tcPr anchor="ctr" marL="73152" marR="73152">
                     <a:lnL w="9525" cap="flat" cmpd="sng" algn="ctr">
                       <a:solidFill>
-                        <a:srgbClr val="ECE3D4"/>
+                        <a:srgbClr val="F6E9D5"/>
                       </a:solidFill>
                       <a:prstDash val="solid"/>
                     </a:lnL>
                     <a:lnR w="9525" cap="flat" cmpd="sng" algn="ctr">
                       <a:solidFill>
-                        <a:srgbClr val="ECE3D4"/>
+                        <a:srgbClr val="F6E9D5"/>
                       </a:solidFill>
                       <a:prstDash val="solid"/>
                     </a:lnR>
                     <a:lnT w="9525" cap="flat" cmpd="sng" algn="ctr">
                       <a:solidFill>
-                        <a:srgbClr val="ECE3D4"/>
+                        <a:srgbClr val="F6E9D5"/>
                       </a:solidFill>
                       <a:prstDash val="solid"/>
                     </a:lnT>
                     <a:lnB w="9525" cap="flat" cmpd="sng" algn="ctr">
                       <a:solidFill>
-                        <a:srgbClr val="ECE3D4"/>
+                        <a:srgbClr val="F6E9D5"/>
                       </a:solidFill>
                       <a:prstDash val="solid"/>
                     </a:lnB>
@@ -7714,7 +7914,7 @@
                       <a:r>
                         <a:rPr sz="1400" b="1">
                           <a:solidFill>
-                            <a:srgbClr val="59472C"/>
+                            <a:srgbClr val="493B27"/>
                           </a:solidFill>
                         </a:rPr>
                         <a:t>연금·노후자금</a:t>
@@ -7724,30 +7924,30 @@
                   <a:tcPr anchor="ctr" marL="73152" marR="73152">
                     <a:lnL w="9525" cap="flat" cmpd="sng" algn="ctr">
                       <a:solidFill>
-                        <a:srgbClr val="ECE3D4"/>
+                        <a:srgbClr val="F6E9D5"/>
                       </a:solidFill>
                       <a:prstDash val="solid"/>
                     </a:lnL>
                     <a:lnR w="9525" cap="flat" cmpd="sng" algn="ctr">
                       <a:solidFill>
-                        <a:srgbClr val="ECE3D4"/>
+                        <a:srgbClr val="F6E9D5"/>
                       </a:solidFill>
                       <a:prstDash val="solid"/>
                     </a:lnR>
                     <a:lnT w="9525" cap="flat" cmpd="sng" algn="ctr">
                       <a:solidFill>
-                        <a:srgbClr val="ECE3D4"/>
+                        <a:srgbClr val="F6E9D5"/>
                       </a:solidFill>
                       <a:prstDash val="solid"/>
                     </a:lnT>
                     <a:lnB w="9525" cap="flat" cmpd="sng" algn="ctr">
                       <a:solidFill>
-                        <a:srgbClr val="ECE3D4"/>
+                        <a:srgbClr val="F6E9D5"/>
                       </a:solidFill>
                       <a:prstDash val="solid"/>
                     </a:lnB>
                     <a:solidFill>
-                      <a:srgbClr val="ECE3D4"/>
+                      <a:srgbClr val="F6E9D5"/>
                     </a:solidFill>
                   </a:tcPr>
                 </a:tc>
@@ -7760,7 +7960,7 @@
                       <a:r>
                         <a:rPr sz="1400" b="0">
                           <a:solidFill>
-                            <a:srgbClr val="2B2B2B"/>
+                            <a:srgbClr val="26231F"/>
                           </a:solidFill>
                         </a:rPr>
                         <a:t>□</a:t>
@@ -7770,30 +7970,30 @@
                   <a:tcPr anchor="ctr" marL="73152" marR="73152">
                     <a:lnL w="9525" cap="flat" cmpd="sng" algn="ctr">
                       <a:solidFill>
-                        <a:srgbClr val="ECE3D4"/>
+                        <a:srgbClr val="F6E9D5"/>
                       </a:solidFill>
                       <a:prstDash val="solid"/>
                     </a:lnL>
                     <a:lnR w="9525" cap="flat" cmpd="sng" algn="ctr">
                       <a:solidFill>
-                        <a:srgbClr val="ECE3D4"/>
+                        <a:srgbClr val="F6E9D5"/>
                       </a:solidFill>
                       <a:prstDash val="solid"/>
                     </a:lnR>
                     <a:lnT w="9525" cap="flat" cmpd="sng" algn="ctr">
                       <a:solidFill>
-                        <a:srgbClr val="ECE3D4"/>
+                        <a:srgbClr val="F6E9D5"/>
                       </a:solidFill>
                       <a:prstDash val="solid"/>
                     </a:lnT>
                     <a:lnB w="9525" cap="flat" cmpd="sng" algn="ctr">
                       <a:solidFill>
-                        <a:srgbClr val="ECE3D4"/>
+                        <a:srgbClr val="F6E9D5"/>
                       </a:solidFill>
                       <a:prstDash val="solid"/>
                     </a:lnB>
                     <a:solidFill>
-                      <a:srgbClr val="F8F5F1"/>
+                      <a:srgbClr val="FBF5EC"/>
                     </a:solidFill>
                   </a:tcPr>
                 </a:tc>
@@ -7806,7 +8006,7 @@
                       <a:r>
                         <a:rPr sz="1400" b="0">
                           <a:solidFill>
-                            <a:srgbClr val="2B2B2B"/>
+                            <a:srgbClr val="26231F"/>
                           </a:solidFill>
                         </a:rPr>
                         <a:t>□</a:t>
@@ -7816,30 +8016,30 @@
                   <a:tcPr anchor="ctr" marL="73152" marR="73152">
                     <a:lnL w="9525" cap="flat" cmpd="sng" algn="ctr">
                       <a:solidFill>
-                        <a:srgbClr val="ECE3D4"/>
+                        <a:srgbClr val="F6E9D5"/>
                       </a:solidFill>
                       <a:prstDash val="solid"/>
                     </a:lnL>
                     <a:lnR w="9525" cap="flat" cmpd="sng" algn="ctr">
                       <a:solidFill>
-                        <a:srgbClr val="ECE3D4"/>
+                        <a:srgbClr val="F6E9D5"/>
                       </a:solidFill>
                       <a:prstDash val="solid"/>
                     </a:lnR>
                     <a:lnT w="9525" cap="flat" cmpd="sng" algn="ctr">
                       <a:solidFill>
-                        <a:srgbClr val="ECE3D4"/>
+                        <a:srgbClr val="F6E9D5"/>
                       </a:solidFill>
                       <a:prstDash val="solid"/>
                     </a:lnT>
                     <a:lnB w="9525" cap="flat" cmpd="sng" algn="ctr">
                       <a:solidFill>
-                        <a:srgbClr val="ECE3D4"/>
+                        <a:srgbClr val="F6E9D5"/>
                       </a:solidFill>
                       <a:prstDash val="solid"/>
                     </a:lnB>
                     <a:solidFill>
-                      <a:srgbClr val="F8F5F1"/>
+                      <a:srgbClr val="FBF5EC"/>
                     </a:solidFill>
                   </a:tcPr>
                 </a:tc>
@@ -7852,7 +8052,7 @@
                       <a:r>
                         <a:rPr sz="1400" b="0">
                           <a:solidFill>
-                            <a:srgbClr val="2B2B2B"/>
+                            <a:srgbClr val="26231F"/>
                           </a:solidFill>
                         </a:rPr>
                         <a:t>□</a:t>
@@ -7862,30 +8062,30 @@
                   <a:tcPr anchor="ctr" marL="73152" marR="73152">
                     <a:lnL w="9525" cap="flat" cmpd="sng" algn="ctr">
                       <a:solidFill>
-                        <a:srgbClr val="ECE3D4"/>
+                        <a:srgbClr val="F6E9D5"/>
                       </a:solidFill>
                       <a:prstDash val="solid"/>
                     </a:lnL>
                     <a:lnR w="9525" cap="flat" cmpd="sng" algn="ctr">
                       <a:solidFill>
-                        <a:srgbClr val="ECE3D4"/>
+                        <a:srgbClr val="F6E9D5"/>
                       </a:solidFill>
                       <a:prstDash val="solid"/>
                     </a:lnR>
                     <a:lnT w="9525" cap="flat" cmpd="sng" algn="ctr">
                       <a:solidFill>
-                        <a:srgbClr val="ECE3D4"/>
+                        <a:srgbClr val="F6E9D5"/>
                       </a:solidFill>
                       <a:prstDash val="solid"/>
                     </a:lnT>
                     <a:lnB w="9525" cap="flat" cmpd="sng" algn="ctr">
                       <a:solidFill>
-                        <a:srgbClr val="ECE3D4"/>
+                        <a:srgbClr val="F6E9D5"/>
                       </a:solidFill>
                       <a:prstDash val="solid"/>
                     </a:lnB>
                     <a:solidFill>
-                      <a:srgbClr val="F8F5F1"/>
+                      <a:srgbClr val="FBF5EC"/>
                     </a:solidFill>
                   </a:tcPr>
                 </a:tc>
@@ -7908,7 +8108,7 @@
     <p:bg>
       <p:bgPr>
         <a:solidFill>
-          <a:srgbClr val="FFFFFF"/>
+          <a:srgbClr val="F6E9D5"/>
         </a:solidFill>
         <a:effectLst/>
       </p:bgPr>
@@ -7928,14 +8128,16 @@
         </p:nvSpPr>
         <p:spPr>
           <a:xfrm>
-            <a:off x="-182880" y="6144768"/>
-            <a:ext cx="12557455" cy="731520"/>
-          </a:xfrm>
-          <a:prstGeom prst="wave">
-            <a:avLst/>
+            <a:off x="640080" y="566928"/>
+            <a:ext cx="64008" cy="868680"/>
+          </a:xfrm>
+          <a:prstGeom prst="roundRect">
+            <a:avLst>
+              <a:gd name="adj" fmla="val 50000"/>
+            </a:avLst>
           </a:prstGeom>
           <a:solidFill>
-            <a:srgbClr val="ECE3D4"/>
+            <a:srgbClr val="D8B279"/>
           </a:solidFill>
           <a:ln>
             <a:noFill/>
@@ -7951,20 +8153,58 @@
       </p:sp>
       <p:sp>
         <p:nvSpPr>
-          <p:cNvPr id="4" name="장식"/>
+          <p:cNvPr id="4" name="상단 라벨"/>
+          <p:cNvSpPr txBox="1"/>
+          <p:nvPr/>
+        </p:nvSpPr>
+        <p:spPr>
+          <a:xfrm>
+            <a:off x="868680" y="274320"/>
+            <a:ext cx="5486400" cy="274320"/>
+          </a:xfrm>
+          <a:prstGeom prst="rect">
+            <a:avLst/>
+          </a:prstGeom>
+          <a:noFill/>
+        </p:spPr>
+        <p:txBody>
+          <a:bodyPr wrap="square" lIns="54864" rIns="54864" tIns="27432" bIns="27432" anchor="ctr">
+            <a:noAutofit/>
+          </a:bodyPr>
+          <a:lstStyle/>
+          <a:p>
+            <a:pPr algn="l">
+              <a:lnSpc>
+                <a:spcPct val="115000"/>
+              </a:lnSpc>
+            </a:pPr>
+            <a:r>
+              <a:rPr sz="900" b="1" i="0" spc="250">
+                <a:solidFill>
+                  <a:srgbClr val="8E8780"/>
+                </a:solidFill>
+              </a:rPr>
+              <a:t>INSURANCE CHECK</a:t>
+            </a:r>
+          </a:p>
+        </p:txBody>
+      </p:sp>
+      <p:sp>
+        <p:nvSpPr>
+          <p:cNvPr id="5" name="포인트"/>
           <p:cNvSpPr/>
           <p:nvPr/>
         </p:nvSpPr>
         <p:spPr>
           <a:xfrm>
-            <a:off x="-182880" y="6400800"/>
-            <a:ext cx="12557455" cy="502920"/>
-          </a:xfrm>
-          <a:prstGeom prst="wave">
+            <a:off x="11167567" y="667512"/>
+            <a:ext cx="310896" cy="310896"/>
+          </a:xfrm>
+          <a:prstGeom prst="ellipse">
             <a:avLst/>
           </a:prstGeom>
           <a:solidFill>
-            <a:srgbClr val="9D7D4D"/>
+            <a:srgbClr val="EBD2AD"/>
           </a:solidFill>
           <a:ln>
             <a:noFill/>
@@ -7990,8 +8230,8 @@
         </p:nvSpPr>
         <p:spPr>
           <a:xfrm>
-            <a:off x="640080" y="457200"/>
-            <a:ext cx="9722815" cy="868680"/>
+            <a:off x="868680" y="566928"/>
+            <a:ext cx="9448495" cy="868680"/>
           </a:xfrm>
         </p:spPr>
         <p:txBody>
@@ -8008,7 +8248,7 @@
             <a:r>
               <a:rPr sz="3000" b="1" i="0">
                 <a:solidFill>
-                  <a:srgbClr val="59472C"/>
+                  <a:srgbClr val="26231F"/>
                 </a:solidFill>
               </a:rPr>
               <a:t>월 보험료 한눈에</a:t>
@@ -8018,26 +8258,24 @@
       </p:sp>
       <p:sp>
         <p:nvSpPr>
-          <p:cNvPr id="5" name="카드 1"/>
+          <p:cNvPr id="6" name="카드 1"/>
           <p:cNvSpPr/>
           <p:nvPr/>
         </p:nvSpPr>
         <p:spPr>
           <a:xfrm>
-            <a:off x="640080" y="1554480"/>
+            <a:off x="640080" y="1783080"/>
             <a:ext cx="3484778" cy="2926080"/>
           </a:xfrm>
           <a:prstGeom prst="roundRect">
             <a:avLst>
-              <a:gd name="adj" fmla="val 8000"/>
+              <a:gd name="adj" fmla="val 7000"/>
             </a:avLst>
           </a:prstGeom>
-          <a:solidFill>
-            <a:srgbClr val="F8F5F1"/>
-          </a:solidFill>
+          <a:noFill/>
           <a:ln w="15875">
             <a:solidFill>
-              <a:srgbClr val="ECE3D4"/>
+              <a:srgbClr val="D8B279"/>
             </a:solidFill>
           </a:ln>
         </p:spPr>
@@ -8051,23 +8289,23 @@
       </p:sp>
       <p:sp>
         <p:nvSpPr>
-          <p:cNvPr id="6" name="번호 1"/>
+          <p:cNvPr id="7" name="번호 1"/>
           <p:cNvSpPr/>
           <p:nvPr/>
         </p:nvSpPr>
         <p:spPr>
           <a:xfrm>
-            <a:off x="822959" y="1737360"/>
+            <a:off x="822959" y="1965960"/>
             <a:ext cx="457200" cy="457200"/>
           </a:xfrm>
           <a:prstGeom prst="ellipse">
             <a:avLst/>
           </a:prstGeom>
-          <a:solidFill>
-            <a:srgbClr val="9D7D4D"/>
-          </a:solidFill>
-          <a:ln>
-            <a:noFill/>
+          <a:noFill/>
+          <a:ln w="19050">
+            <a:solidFill>
+              <a:srgbClr val="D8B279"/>
+            </a:solidFill>
           </a:ln>
         </p:spPr>
         <p:txBody>
@@ -8084,7 +8322,7 @@
             <a:r>
               <a:rPr sz="1600" b="1" i="0">
                 <a:solidFill>
-                  <a:srgbClr val="FFFFFF"/>
+                  <a:srgbClr val="493B27"/>
                 </a:solidFill>
               </a:rPr>
               <a:t>1</a:t>
@@ -8094,13 +8332,13 @@
       </p:sp>
       <p:sp>
         <p:nvSpPr>
-          <p:cNvPr id="7" name="TextBox 6"/>
+          <p:cNvPr id="8" name="TextBox 7"/>
           <p:cNvSpPr txBox="1"/>
           <p:nvPr/>
         </p:nvSpPr>
         <p:spPr>
           <a:xfrm>
-            <a:off x="777240" y="2331720"/>
+            <a:off x="777240" y="2560320"/>
             <a:ext cx="3210458" cy="640080"/>
           </a:xfrm>
           <a:prstGeom prst="rect">
@@ -8122,7 +8360,7 @@
             <a:r>
               <a:rPr sz="1700" b="1" i="0">
                 <a:solidFill>
-                  <a:srgbClr val="59472C"/>
+                  <a:srgbClr val="493B27"/>
                 </a:solidFill>
               </a:rPr>
               <a:t>월 보험료 합계</a:t>
@@ -8132,13 +8370,13 @@
       </p:sp>
       <p:sp>
         <p:nvSpPr>
-          <p:cNvPr id="8" name="TextBox 7"/>
+          <p:cNvPr id="9" name="TextBox 8"/>
           <p:cNvSpPr txBox="1"/>
           <p:nvPr/>
         </p:nvSpPr>
         <p:spPr>
           <a:xfrm>
-            <a:off x="777240" y="3017520"/>
+            <a:off x="777240" y="3246120"/>
             <a:ext cx="3210458" cy="1325880"/>
           </a:xfrm>
           <a:prstGeom prst="rect">
@@ -8160,7 +8398,7 @@
             <a:r>
               <a:rPr sz="3000" b="0" i="0">
                 <a:solidFill>
-                  <a:srgbClr val="2B2B2B"/>
+                  <a:srgbClr val="26231F"/>
                 </a:solidFill>
               </a:rPr>
               <a:t>0원</a:t>
@@ -8170,26 +8408,24 @@
       </p:sp>
       <p:sp>
         <p:nvSpPr>
-          <p:cNvPr id="9" name="카드 2"/>
+          <p:cNvPr id="10" name="카드 2"/>
           <p:cNvSpPr/>
           <p:nvPr/>
         </p:nvSpPr>
         <p:spPr>
           <a:xfrm>
-            <a:off x="4353458" y="1554480"/>
+            <a:off x="4353458" y="1783080"/>
             <a:ext cx="3484778" cy="2926080"/>
           </a:xfrm>
           <a:prstGeom prst="roundRect">
             <a:avLst>
-              <a:gd name="adj" fmla="val 8000"/>
+              <a:gd name="adj" fmla="val 7000"/>
             </a:avLst>
           </a:prstGeom>
-          <a:solidFill>
-            <a:srgbClr val="F8F5F1"/>
-          </a:solidFill>
+          <a:noFill/>
           <a:ln w="15875">
             <a:solidFill>
-              <a:srgbClr val="ECE3D4"/>
+              <a:srgbClr val="D8B279"/>
             </a:solidFill>
           </a:ln>
         </p:spPr>
@@ -8203,23 +8439,23 @@
       </p:sp>
       <p:sp>
         <p:nvSpPr>
-          <p:cNvPr id="10" name="번호 2"/>
+          <p:cNvPr id="11" name="번호 2"/>
           <p:cNvSpPr/>
           <p:nvPr/>
         </p:nvSpPr>
         <p:spPr>
           <a:xfrm>
-            <a:off x="4536338" y="1737360"/>
+            <a:off x="4536338" y="1965960"/>
             <a:ext cx="457200" cy="457200"/>
           </a:xfrm>
           <a:prstGeom prst="ellipse">
             <a:avLst/>
           </a:prstGeom>
-          <a:solidFill>
-            <a:srgbClr val="9D7D4D"/>
-          </a:solidFill>
-          <a:ln>
-            <a:noFill/>
+          <a:noFill/>
+          <a:ln w="19050">
+            <a:solidFill>
+              <a:srgbClr val="D8B279"/>
+            </a:solidFill>
           </a:ln>
         </p:spPr>
         <p:txBody>
@@ -8236,7 +8472,7 @@
             <a:r>
               <a:rPr sz="1600" b="1" i="0">
                 <a:solidFill>
-                  <a:srgbClr val="FFFFFF"/>
+                  <a:srgbClr val="493B27"/>
                 </a:solidFill>
               </a:rPr>
               <a:t>2</a:t>
@@ -8246,13 +8482,13 @@
       </p:sp>
       <p:sp>
         <p:nvSpPr>
-          <p:cNvPr id="11" name="TextBox 10"/>
+          <p:cNvPr id="12" name="TextBox 11"/>
           <p:cNvSpPr txBox="1"/>
           <p:nvPr/>
         </p:nvSpPr>
         <p:spPr>
           <a:xfrm>
-            <a:off x="4490618" y="2331720"/>
+            <a:off x="4490618" y="2560320"/>
             <a:ext cx="3210458" cy="640080"/>
           </a:xfrm>
           <a:prstGeom prst="rect">
@@ -8274,7 +8510,7 @@
             <a:r>
               <a:rPr sz="1700" b="1" i="0">
                 <a:solidFill>
-                  <a:srgbClr val="59472C"/>
+                  <a:srgbClr val="493B27"/>
                 </a:solidFill>
               </a:rPr>
               <a:t>연 보험료 합계</a:t>
@@ -8284,13 +8520,13 @@
       </p:sp>
       <p:sp>
         <p:nvSpPr>
-          <p:cNvPr id="12" name="TextBox 11"/>
+          <p:cNvPr id="13" name="TextBox 12"/>
           <p:cNvSpPr txBox="1"/>
           <p:nvPr/>
         </p:nvSpPr>
         <p:spPr>
           <a:xfrm>
-            <a:off x="4490618" y="3017520"/>
+            <a:off x="4490618" y="3246120"/>
             <a:ext cx="3210458" cy="1325880"/>
           </a:xfrm>
           <a:prstGeom prst="rect">
@@ -8312,7 +8548,7 @@
             <a:r>
               <a:rPr sz="3000" b="0" i="0">
                 <a:solidFill>
-                  <a:srgbClr val="2B2B2B"/>
+                  <a:srgbClr val="26231F"/>
                 </a:solidFill>
               </a:rPr>
               <a:t>0원</a:t>
@@ -8322,26 +8558,24 @@
       </p:sp>
       <p:sp>
         <p:nvSpPr>
-          <p:cNvPr id="13" name="카드 3"/>
+          <p:cNvPr id="14" name="카드 3"/>
           <p:cNvSpPr/>
           <p:nvPr/>
         </p:nvSpPr>
         <p:spPr>
           <a:xfrm>
-            <a:off x="8066836" y="1554480"/>
+            <a:off x="8066836" y="1783080"/>
             <a:ext cx="3484778" cy="2926080"/>
           </a:xfrm>
           <a:prstGeom prst="roundRect">
             <a:avLst>
-              <a:gd name="adj" fmla="val 8000"/>
+              <a:gd name="adj" fmla="val 7000"/>
             </a:avLst>
           </a:prstGeom>
-          <a:solidFill>
-            <a:srgbClr val="F8F5F1"/>
-          </a:solidFill>
+          <a:noFill/>
           <a:ln w="15875">
             <a:solidFill>
-              <a:srgbClr val="ECE3D4"/>
+              <a:srgbClr val="D8B279"/>
             </a:solidFill>
           </a:ln>
         </p:spPr>
@@ -8355,23 +8589,23 @@
       </p:sp>
       <p:sp>
         <p:nvSpPr>
-          <p:cNvPr id="14" name="번호 3"/>
+          <p:cNvPr id="15" name="번호 3"/>
           <p:cNvSpPr/>
           <p:nvPr/>
         </p:nvSpPr>
         <p:spPr>
           <a:xfrm>
-            <a:off x="8249716" y="1737360"/>
+            <a:off x="8249716" y="1965960"/>
             <a:ext cx="457200" cy="457200"/>
           </a:xfrm>
           <a:prstGeom prst="ellipse">
             <a:avLst/>
           </a:prstGeom>
-          <a:solidFill>
-            <a:srgbClr val="9D7D4D"/>
-          </a:solidFill>
-          <a:ln>
-            <a:noFill/>
+          <a:noFill/>
+          <a:ln w="19050">
+            <a:solidFill>
+              <a:srgbClr val="D8B279"/>
+            </a:solidFill>
           </a:ln>
         </p:spPr>
         <p:txBody>
@@ -8388,7 +8622,7 @@
             <a:r>
               <a:rPr sz="1600" b="1" i="0">
                 <a:solidFill>
-                  <a:srgbClr val="FFFFFF"/>
+                  <a:srgbClr val="493B27"/>
                 </a:solidFill>
               </a:rPr>
               <a:t>3</a:t>
@@ -8398,13 +8632,13 @@
       </p:sp>
       <p:sp>
         <p:nvSpPr>
-          <p:cNvPr id="15" name="TextBox 14"/>
+          <p:cNvPr id="16" name="TextBox 15"/>
           <p:cNvSpPr txBox="1"/>
           <p:nvPr/>
         </p:nvSpPr>
         <p:spPr>
           <a:xfrm>
-            <a:off x="8203996" y="2331720"/>
+            <a:off x="8203996" y="2560320"/>
             <a:ext cx="3210458" cy="640080"/>
           </a:xfrm>
           <a:prstGeom prst="rect">
@@ -8426,7 +8660,7 @@
             <a:r>
               <a:rPr sz="1700" b="1" i="0">
                 <a:solidFill>
-                  <a:srgbClr val="59472C"/>
+                  <a:srgbClr val="493B27"/>
                 </a:solidFill>
               </a:rPr>
               <a:t>월 소득 대비</a:t>
@@ -8436,13 +8670,13 @@
       </p:sp>
       <p:sp>
         <p:nvSpPr>
-          <p:cNvPr id="16" name="TextBox 15"/>
+          <p:cNvPr id="17" name="TextBox 16"/>
           <p:cNvSpPr txBox="1"/>
           <p:nvPr/>
         </p:nvSpPr>
         <p:spPr>
           <a:xfrm>
-            <a:off x="8203996" y="3017520"/>
+            <a:off x="8203996" y="3246120"/>
             <a:ext cx="3210458" cy="1325880"/>
           </a:xfrm>
           <a:prstGeom prst="rect">
@@ -8464,7 +8698,7 @@
             <a:r>
               <a:rPr sz="3000" b="0" i="0">
                 <a:solidFill>
-                  <a:srgbClr val="2B2B2B"/>
+                  <a:srgbClr val="26231F"/>
                 </a:solidFill>
               </a:rPr>
               <a:t>0 %</a:t>
@@ -8474,13 +8708,13 @@
       </p:sp>
       <p:sp>
         <p:nvSpPr>
-          <p:cNvPr id="17" name="안내"/>
+          <p:cNvPr id="18" name="안내"/>
           <p:cNvSpPr txBox="1"/>
           <p:nvPr/>
         </p:nvSpPr>
         <p:spPr>
           <a:xfrm>
-            <a:off x="640080" y="4663440"/>
+            <a:off x="640080" y="4892040"/>
             <a:ext cx="10911535" cy="365760"/>
           </a:xfrm>
           <a:prstGeom prst="rect">
@@ -8524,7 +8758,7 @@
     <p:bg>
       <p:bgPr>
         <a:solidFill>
-          <a:srgbClr val="FFFFFF"/>
+          <a:srgbClr val="F6E9D5"/>
         </a:solidFill>
         <a:effectLst/>
       </p:bgPr>
@@ -8544,14 +8778,16 @@
         </p:nvSpPr>
         <p:spPr>
           <a:xfrm>
-            <a:off x="-182880" y="6144768"/>
-            <a:ext cx="12557455" cy="731520"/>
-          </a:xfrm>
-          <a:prstGeom prst="wave">
-            <a:avLst/>
+            <a:off x="640080" y="566928"/>
+            <a:ext cx="64008" cy="868680"/>
+          </a:xfrm>
+          <a:prstGeom prst="roundRect">
+            <a:avLst>
+              <a:gd name="adj" fmla="val 50000"/>
+            </a:avLst>
           </a:prstGeom>
           <a:solidFill>
-            <a:srgbClr val="ECE3D4"/>
+            <a:srgbClr val="D8B279"/>
           </a:solidFill>
           <a:ln>
             <a:noFill/>
@@ -8567,20 +8803,58 @@
       </p:sp>
       <p:sp>
         <p:nvSpPr>
-          <p:cNvPr id="4" name="장식"/>
+          <p:cNvPr id="4" name="상단 라벨"/>
+          <p:cNvSpPr txBox="1"/>
+          <p:nvPr/>
+        </p:nvSpPr>
+        <p:spPr>
+          <a:xfrm>
+            <a:off x="868680" y="274320"/>
+            <a:ext cx="5486400" cy="274320"/>
+          </a:xfrm>
+          <a:prstGeom prst="rect">
+            <a:avLst/>
+          </a:prstGeom>
+          <a:noFill/>
+        </p:spPr>
+        <p:txBody>
+          <a:bodyPr wrap="square" lIns="54864" rIns="54864" tIns="27432" bIns="27432" anchor="ctr">
+            <a:noAutofit/>
+          </a:bodyPr>
+          <a:lstStyle/>
+          <a:p>
+            <a:pPr algn="l">
+              <a:lnSpc>
+                <a:spcPct val="115000"/>
+              </a:lnSpc>
+            </a:pPr>
+            <a:r>
+              <a:rPr sz="900" b="1" i="0" spc="250">
+                <a:solidFill>
+                  <a:srgbClr val="8E8780"/>
+                </a:solidFill>
+              </a:rPr>
+              <a:t>INSURANCE CHECK</a:t>
+            </a:r>
+          </a:p>
+        </p:txBody>
+      </p:sp>
+      <p:sp>
+        <p:nvSpPr>
+          <p:cNvPr id="5" name="포인트"/>
           <p:cNvSpPr/>
           <p:nvPr/>
         </p:nvSpPr>
         <p:spPr>
           <a:xfrm>
-            <a:off x="-182880" y="6400800"/>
-            <a:ext cx="12557455" cy="502920"/>
-          </a:xfrm>
-          <a:prstGeom prst="wave">
+            <a:off x="11167567" y="667512"/>
+            <a:ext cx="310896" cy="310896"/>
+          </a:xfrm>
+          <a:prstGeom prst="ellipse">
             <a:avLst/>
           </a:prstGeom>
           <a:solidFill>
-            <a:srgbClr val="9D7D4D"/>
+            <a:srgbClr val="EBD2AD"/>
           </a:solidFill>
           <a:ln>
             <a:noFill/>
@@ -8606,8 +8880,8 @@
         </p:nvSpPr>
         <p:spPr>
           <a:xfrm>
-            <a:off x="640080" y="457200"/>
-            <a:ext cx="9722815" cy="868680"/>
+            <a:off x="868680" y="566928"/>
+            <a:ext cx="9448495" cy="868680"/>
           </a:xfrm>
         </p:spPr>
         <p:txBody>
@@ -8624,7 +8898,7 @@
             <a:r>
               <a:rPr sz="3000" b="1" i="0">
                 <a:solidFill>
-                  <a:srgbClr val="59472C"/>
+                  <a:srgbClr val="26231F"/>
                 </a:solidFill>
               </a:rPr>
               <a:t>점검 메모와 다음 할 일</a:t>
@@ -8634,26 +8908,24 @@
       </p:sp>
       <p:sp>
         <p:nvSpPr>
-          <p:cNvPr id="5" name="카드 1"/>
+          <p:cNvPr id="6" name="카드 1"/>
           <p:cNvSpPr/>
           <p:nvPr/>
         </p:nvSpPr>
         <p:spPr>
           <a:xfrm>
-            <a:off x="640080" y="1554480"/>
-            <a:ext cx="3484778" cy="3749039"/>
+            <a:off x="640080" y="1783080"/>
+            <a:ext cx="3484778" cy="3931920"/>
           </a:xfrm>
           <a:prstGeom prst="roundRect">
             <a:avLst>
-              <a:gd name="adj" fmla="val 8000"/>
+              <a:gd name="adj" fmla="val 7000"/>
             </a:avLst>
           </a:prstGeom>
-          <a:solidFill>
-            <a:srgbClr val="F8F5F1"/>
-          </a:solidFill>
+          <a:noFill/>
           <a:ln w="15875">
             <a:solidFill>
-              <a:srgbClr val="ECE3D4"/>
+              <a:srgbClr val="D8B279"/>
             </a:solidFill>
           </a:ln>
         </p:spPr>
@@ -8667,23 +8939,23 @@
       </p:sp>
       <p:sp>
         <p:nvSpPr>
-          <p:cNvPr id="6" name="번호 1"/>
+          <p:cNvPr id="7" name="번호 1"/>
           <p:cNvSpPr/>
           <p:nvPr/>
         </p:nvSpPr>
         <p:spPr>
           <a:xfrm>
-            <a:off x="822959" y="1737360"/>
+            <a:off x="822959" y="1965960"/>
             <a:ext cx="457200" cy="457200"/>
           </a:xfrm>
           <a:prstGeom prst="ellipse">
             <a:avLst/>
           </a:prstGeom>
-          <a:solidFill>
-            <a:srgbClr val="9D7D4D"/>
-          </a:solidFill>
-          <a:ln>
-            <a:noFill/>
+          <a:noFill/>
+          <a:ln w="19050">
+            <a:solidFill>
+              <a:srgbClr val="D8B279"/>
+            </a:solidFill>
           </a:ln>
         </p:spPr>
         <p:txBody>
@@ -8700,7 +8972,7 @@
             <a:r>
               <a:rPr sz="1600" b="1" i="0">
                 <a:solidFill>
-                  <a:srgbClr val="FFFFFF"/>
+                  <a:srgbClr val="493B27"/>
                 </a:solidFill>
               </a:rPr>
               <a:t>1</a:t>
@@ -8710,13 +8982,13 @@
       </p:sp>
       <p:sp>
         <p:nvSpPr>
-          <p:cNvPr id="7" name="TextBox 6"/>
+          <p:cNvPr id="8" name="TextBox 7"/>
           <p:cNvSpPr txBox="1"/>
           <p:nvPr/>
         </p:nvSpPr>
         <p:spPr>
           <a:xfrm>
-            <a:off x="777240" y="2331720"/>
+            <a:off x="777240" y="2560320"/>
             <a:ext cx="3210458" cy="640080"/>
           </a:xfrm>
           <a:prstGeom prst="rect">
@@ -8738,7 +9010,7 @@
             <a:r>
               <a:rPr sz="1800" b="1" i="0">
                 <a:solidFill>
-                  <a:srgbClr val="59472C"/>
+                  <a:srgbClr val="493B27"/>
                 </a:solidFill>
               </a:rPr>
               <a:t>확인할 것</a:t>
@@ -8748,14 +9020,14 @@
       </p:sp>
       <p:sp>
         <p:nvSpPr>
-          <p:cNvPr id="8" name="TextBox 7"/>
+          <p:cNvPr id="9" name="TextBox 8"/>
           <p:cNvSpPr txBox="1"/>
           <p:nvPr/>
         </p:nvSpPr>
         <p:spPr>
           <a:xfrm>
-            <a:off x="777240" y="3017520"/>
-            <a:ext cx="3210458" cy="2148839"/>
+            <a:off x="777240" y="3246120"/>
+            <a:ext cx="3210458" cy="2331720"/>
           </a:xfrm>
           <a:prstGeom prst="rect">
             <a:avLst/>
@@ -8776,7 +9048,7 @@
             <a:r>
               <a:rPr sz="1500" b="0" i="0">
                 <a:solidFill>
-                  <a:srgbClr val="2B2B2B"/>
+                  <a:srgbClr val="26231F"/>
                 </a:solidFill>
               </a:rPr>
               <a:t>내용을 입력하세요</a:t>
@@ -8786,26 +9058,24 @@
       </p:sp>
       <p:sp>
         <p:nvSpPr>
-          <p:cNvPr id="9" name="카드 2"/>
+          <p:cNvPr id="10" name="카드 2"/>
           <p:cNvSpPr/>
           <p:nvPr/>
         </p:nvSpPr>
         <p:spPr>
           <a:xfrm>
-            <a:off x="4353458" y="1554480"/>
-            <a:ext cx="3484778" cy="3749039"/>
+            <a:off x="4353458" y="1783080"/>
+            <a:ext cx="3484778" cy="3931920"/>
           </a:xfrm>
           <a:prstGeom prst="roundRect">
             <a:avLst>
-              <a:gd name="adj" fmla="val 8000"/>
+              <a:gd name="adj" fmla="val 7000"/>
             </a:avLst>
           </a:prstGeom>
-          <a:solidFill>
-            <a:srgbClr val="F8F5F1"/>
-          </a:solidFill>
+          <a:noFill/>
           <a:ln w="15875">
             <a:solidFill>
-              <a:srgbClr val="ECE3D4"/>
+              <a:srgbClr val="D8B279"/>
             </a:solidFill>
           </a:ln>
         </p:spPr>
@@ -8819,23 +9089,23 @@
       </p:sp>
       <p:sp>
         <p:nvSpPr>
-          <p:cNvPr id="10" name="번호 2"/>
+          <p:cNvPr id="11" name="번호 2"/>
           <p:cNvSpPr/>
           <p:nvPr/>
         </p:nvSpPr>
         <p:spPr>
           <a:xfrm>
-            <a:off x="4536338" y="1737360"/>
+            <a:off x="4536338" y="1965960"/>
             <a:ext cx="457200" cy="457200"/>
           </a:xfrm>
           <a:prstGeom prst="ellipse">
             <a:avLst/>
           </a:prstGeom>
-          <a:solidFill>
-            <a:srgbClr val="9D7D4D"/>
-          </a:solidFill>
-          <a:ln>
-            <a:noFill/>
+          <a:noFill/>
+          <a:ln w="19050">
+            <a:solidFill>
+              <a:srgbClr val="D8B279"/>
+            </a:solidFill>
           </a:ln>
         </p:spPr>
         <p:txBody>
@@ -8852,7 +9122,7 @@
             <a:r>
               <a:rPr sz="1600" b="1" i="0">
                 <a:solidFill>
-                  <a:srgbClr val="FFFFFF"/>
+                  <a:srgbClr val="493B27"/>
                 </a:solidFill>
               </a:rPr>
               <a:t>2</a:t>
@@ -8862,13 +9132,13 @@
       </p:sp>
       <p:sp>
         <p:nvSpPr>
-          <p:cNvPr id="11" name="TextBox 10"/>
+          <p:cNvPr id="12" name="TextBox 11"/>
           <p:cNvSpPr txBox="1"/>
           <p:nvPr/>
         </p:nvSpPr>
         <p:spPr>
           <a:xfrm>
-            <a:off x="4490618" y="2331720"/>
+            <a:off x="4490618" y="2560320"/>
             <a:ext cx="3210458" cy="640080"/>
           </a:xfrm>
           <a:prstGeom prst="rect">
@@ -8890,7 +9160,7 @@
             <a:r>
               <a:rPr sz="1800" b="1" i="0">
                 <a:solidFill>
-                  <a:srgbClr val="59472C"/>
+                  <a:srgbClr val="493B27"/>
                 </a:solidFill>
               </a:rPr>
               <a:t>문의할 것</a:t>
@@ -8900,14 +9170,14 @@
       </p:sp>
       <p:sp>
         <p:nvSpPr>
-          <p:cNvPr id="12" name="TextBox 11"/>
+          <p:cNvPr id="13" name="TextBox 12"/>
           <p:cNvSpPr txBox="1"/>
           <p:nvPr/>
         </p:nvSpPr>
         <p:spPr>
           <a:xfrm>
-            <a:off x="4490618" y="3017520"/>
-            <a:ext cx="3210458" cy="2148839"/>
+            <a:off x="4490618" y="3246120"/>
+            <a:ext cx="3210458" cy="2331720"/>
           </a:xfrm>
           <a:prstGeom prst="rect">
             <a:avLst/>
@@ -8928,7 +9198,7 @@
             <a:r>
               <a:rPr sz="1500" b="0" i="0">
                 <a:solidFill>
-                  <a:srgbClr val="2B2B2B"/>
+                  <a:srgbClr val="26231F"/>
                 </a:solidFill>
               </a:rPr>
               <a:t>내용을 입력하세요</a:t>
@@ -8938,26 +9208,24 @@
       </p:sp>
       <p:sp>
         <p:nvSpPr>
-          <p:cNvPr id="13" name="카드 3"/>
+          <p:cNvPr id="14" name="카드 3"/>
           <p:cNvSpPr/>
           <p:nvPr/>
         </p:nvSpPr>
         <p:spPr>
           <a:xfrm>
-            <a:off x="8066836" y="1554480"/>
-            <a:ext cx="3484778" cy="3749039"/>
+            <a:off x="8066836" y="1783080"/>
+            <a:ext cx="3484778" cy="3931920"/>
           </a:xfrm>
           <a:prstGeom prst="roundRect">
             <a:avLst>
-              <a:gd name="adj" fmla="val 8000"/>
+              <a:gd name="adj" fmla="val 7000"/>
             </a:avLst>
           </a:prstGeom>
-          <a:solidFill>
-            <a:srgbClr val="F8F5F1"/>
-          </a:solidFill>
+          <a:noFill/>
           <a:ln w="15875">
             <a:solidFill>
-              <a:srgbClr val="ECE3D4"/>
+              <a:srgbClr val="D8B279"/>
             </a:solidFill>
           </a:ln>
         </p:spPr>
@@ -8971,23 +9239,23 @@
       </p:sp>
       <p:sp>
         <p:nvSpPr>
-          <p:cNvPr id="14" name="번호 3"/>
+          <p:cNvPr id="15" name="번호 3"/>
           <p:cNvSpPr/>
           <p:nvPr/>
         </p:nvSpPr>
         <p:spPr>
           <a:xfrm>
-            <a:off x="8249716" y="1737360"/>
+            <a:off x="8249716" y="1965960"/>
             <a:ext cx="457200" cy="457200"/>
           </a:xfrm>
           <a:prstGeom prst="ellipse">
             <a:avLst/>
           </a:prstGeom>
-          <a:solidFill>
-            <a:srgbClr val="9D7D4D"/>
-          </a:solidFill>
-          <a:ln>
-            <a:noFill/>
+          <a:noFill/>
+          <a:ln w="19050">
+            <a:solidFill>
+              <a:srgbClr val="D8B279"/>
+            </a:solidFill>
           </a:ln>
         </p:spPr>
         <p:txBody>
@@ -9004,7 +9272,7 @@
             <a:r>
               <a:rPr sz="1600" b="1" i="0">
                 <a:solidFill>
-                  <a:srgbClr val="FFFFFF"/>
+                  <a:srgbClr val="493B27"/>
                 </a:solidFill>
               </a:rPr>
               <a:t>3</a:t>
@@ -9014,13 +9282,13 @@
       </p:sp>
       <p:sp>
         <p:nvSpPr>
-          <p:cNvPr id="15" name="TextBox 14"/>
+          <p:cNvPr id="16" name="TextBox 15"/>
           <p:cNvSpPr txBox="1"/>
           <p:nvPr/>
         </p:nvSpPr>
         <p:spPr>
           <a:xfrm>
-            <a:off x="8203996" y="2331720"/>
+            <a:off x="8203996" y="2560320"/>
             <a:ext cx="3210458" cy="640080"/>
           </a:xfrm>
           <a:prstGeom prst="rect">
@@ -9042,7 +9310,7 @@
             <a:r>
               <a:rPr sz="1800" b="1" i="0">
                 <a:solidFill>
-                  <a:srgbClr val="59472C"/>
+                  <a:srgbClr val="493B27"/>
                 </a:solidFill>
               </a:rPr>
               <a:t>정리할 날짜</a:t>
@@ -9052,14 +9320,14 @@
       </p:sp>
       <p:sp>
         <p:nvSpPr>
-          <p:cNvPr id="16" name="TextBox 15"/>
+          <p:cNvPr id="17" name="TextBox 16"/>
           <p:cNvSpPr txBox="1"/>
           <p:nvPr/>
         </p:nvSpPr>
         <p:spPr>
           <a:xfrm>
-            <a:off x="8203996" y="3017520"/>
-            <a:ext cx="3210458" cy="2148839"/>
+            <a:off x="8203996" y="3246120"/>
+            <a:ext cx="3210458" cy="2331720"/>
           </a:xfrm>
           <a:prstGeom prst="rect">
             <a:avLst/>
@@ -9080,7 +9348,7 @@
             <a:r>
               <a:rPr sz="1500" b="0" i="0">
                 <a:solidFill>
-                  <a:srgbClr val="2B2B2B"/>
+                  <a:srgbClr val="26231F"/>
                 </a:solidFill>
               </a:rPr>
               <a:t>내용을 입력하세요</a:t>
@@ -9090,13 +9358,13 @@
       </p:sp>
       <p:sp>
         <p:nvSpPr>
-          <p:cNvPr id="17" name="안내 문구"/>
+          <p:cNvPr id="18" name="안내 문구"/>
           <p:cNvSpPr txBox="1"/>
           <p:nvPr/>
         </p:nvSpPr>
         <p:spPr>
           <a:xfrm>
-            <a:off x="640080" y="5394960"/>
+            <a:off x="640080" y="5806440"/>
             <a:ext cx="10911535" cy="548640"/>
           </a:xfrm>
           <a:prstGeom prst="rect">
@@ -9145,34 +9413,34 @@
         <a:sysClr val="window" lastClr="FFFFFF"/>
       </a:lt1>
       <a:dk2>
-        <a:srgbClr val="59472C"/>
+        <a:srgbClr val="493B27"/>
       </a:dk2>
       <a:lt2>
-        <a:srgbClr val="F8F5F1"/>
+        <a:srgbClr val="FBF5EC"/>
       </a:lt2>
       <a:accent1>
-        <a:srgbClr val="9D7D4D"/>
+        <a:srgbClr val="D8B279"/>
       </a:accent1>
       <a:accent2>
-        <a:srgbClr val="438289"/>
+        <a:srgbClr val="DCE198"/>
       </a:accent2>
       <a:accent3>
-        <a:srgbClr val="59472C"/>
+        <a:srgbClr val="493B27"/>
       </a:accent3>
       <a:accent4>
-        <a:srgbClr val="ECE3D4"/>
+        <a:srgbClr val="F6E9D5"/>
       </a:accent4>
       <a:accent5>
-        <a:srgbClr val="70806B"/>
+        <a:srgbClr val="DACA88"/>
       </a:accent5>
       <a:accent6>
-        <a:srgbClr val="9B9180"/>
+        <a:srgbClr val="92897D"/>
       </a:accent6>
       <a:hlink>
-        <a:srgbClr val="9D7D4D"/>
+        <a:srgbClr val="D8B279"/>
       </a:hlink>
       <a:folHlink>
-        <a:srgbClr val="59472C"/>
+        <a:srgbClr val="493B27"/>
       </a:folHlink>
     </a:clrScheme>
     <a:fontScheme name="Office">
